--- a/Презентация_Сквер_Марии_Рубцовой_Титова_Ева.pptx
+++ b/Презентация_Сквер_Марии_Рубцовой_Титова_Ева.pptx
@@ -13,6 +13,10 @@
     <p:sldId id="261" r:id="rId12"/>
     <p:sldId id="262" r:id="rId13"/>
     <p:sldId id="263" r:id="rId14"/>
+    <p:sldId id="264" r:id="rId15"/>
+    <p:sldId id="265" r:id="rId16"/>
+    <p:sldId id="266" r:id="rId17"/>
+    <p:sldId id="267" r:id="rId18"/>
   </p:sldIdLst>
   <p:sldSz cx="12191695" cy="6858000" type="screen4x3"/>
   <p:notesSz cx="6858000" cy="9144000"/>
@@ -3095,9 +3099,1005 @@
         <p:nvPr/>
       </p:nvGrpSpPr>
       <p:grpSpPr/>
+      <p:sp>
+        <p:nvSpPr>
+          <p:cNvPr id="2" name="Rectangle 1"/>
+          <p:cNvSpPr/>
+          <p:nvPr/>
+        </p:nvSpPr>
+        <p:spPr>
+          <a:xfrm>
+            <a:off x="0" y="0"/>
+            <a:ext cx="12191695" cy="6858000"/>
+          </a:xfrm>
+          <a:prstGeom prst="rect">
+            <a:avLst/>
+          </a:prstGeom>
+          <a:solidFill>
+            <a:srgbClr val="F6F3EA"/>
+          </a:solidFill>
+          <a:ln>
+            <a:noFill/>
+          </a:ln>
+        </p:spPr>
+        <p:style>
+          <a:lnRef idx="1">
+            <a:schemeClr val="accent1"/>
+          </a:lnRef>
+          <a:fillRef idx="3">
+            <a:schemeClr val="accent1"/>
+          </a:fillRef>
+          <a:effectRef idx="2">
+            <a:schemeClr val="accent1"/>
+          </a:effectRef>
+          <a:fontRef idx="minor">
+            <a:schemeClr val="lt1"/>
+          </a:fontRef>
+        </p:style>
+        <p:txBody>
+          <a:bodyPr rtlCol="0" anchor="ctr"/>
+          <a:lstStyle/>
+          <a:p>
+            <a:pPr algn="ctr"/>
+          </a:p>
+        </p:txBody>
+      </p:sp>
+      <p:sp>
+        <p:nvSpPr>
+          <p:cNvPr id="3" name="Rectangle 2"/>
+          <p:cNvSpPr/>
+          <p:nvPr/>
+        </p:nvSpPr>
+        <p:spPr>
+          <a:xfrm>
+            <a:off x="0" y="0"/>
+            <a:ext cx="12191695" cy="960120"/>
+          </a:xfrm>
+          <a:prstGeom prst="rect">
+            <a:avLst/>
+          </a:prstGeom>
+          <a:solidFill>
+            <a:srgbClr val="1B5E45"/>
+          </a:solidFill>
+          <a:ln>
+            <a:noFill/>
+          </a:ln>
+        </p:spPr>
+        <p:style>
+          <a:lnRef idx="1">
+            <a:schemeClr val="accent1"/>
+          </a:lnRef>
+          <a:fillRef idx="3">
+            <a:schemeClr val="accent1"/>
+          </a:fillRef>
+          <a:effectRef idx="2">
+            <a:schemeClr val="accent1"/>
+          </a:effectRef>
+          <a:fontRef idx="minor">
+            <a:schemeClr val="lt1"/>
+          </a:fontRef>
+        </p:style>
+        <p:txBody>
+          <a:bodyPr rtlCol="0" anchor="ctr"/>
+          <a:lstStyle/>
+          <a:p>
+            <a:pPr algn="ctr"/>
+          </a:p>
+        </p:txBody>
+      </p:sp>
+      <p:sp>
+        <p:nvSpPr>
+          <p:cNvPr id="4" name="TextBox 3"/>
+          <p:cNvSpPr txBox="1"/>
+          <p:nvPr/>
+        </p:nvSpPr>
+        <p:spPr>
+          <a:xfrm>
+            <a:off x="365760" y="164592"/>
+            <a:ext cx="11338560" cy="658368"/>
+          </a:xfrm>
+          <a:prstGeom prst="rect">
+            <a:avLst/>
+          </a:prstGeom>
+          <a:noFill/>
+        </p:spPr>
+        <p:txBody>
+          <a:bodyPr wrap="square" lIns="54864" rIns="54864" tIns="18288" bIns="18288"/>
+          <a:lstStyle/>
+          <a:p>
+            <a:pPr algn="l">
+              <a:lnSpc>
+                <a:spcPct val="100000"/>
+              </a:lnSpc>
+              <a:spcAft>
+                <a:spcPts val="600"/>
+              </a:spcAft>
+            </a:pPr>
+            <a:r>
+              <a:rPr sz="3000" b="1">
+                <a:solidFill>
+                  <a:srgbClr val="FFFFFF"/>
+                </a:solidFill>
+                <a:latin typeface="Arial"/>
+                <a:cs typeface="Arial"/>
+                <a:ea typeface="Arial"/>
+              </a:rPr>
+              <a:t>Сквер имени Марии Рубцовой</a:t>
+            </a:r>
+          </a:p>
+        </p:txBody>
+      </p:sp>
+      <p:sp>
+        <p:nvSpPr>
+          <p:cNvPr id="5" name="Rectangle 4"/>
+          <p:cNvSpPr/>
+          <p:nvPr/>
+        </p:nvSpPr>
+        <p:spPr>
+          <a:xfrm>
+            <a:off x="292608" y="1170432"/>
+            <a:ext cx="6035040" cy="4800600"/>
+          </a:xfrm>
+          <a:prstGeom prst="rect">
+            <a:avLst/>
+          </a:prstGeom>
+          <a:solidFill>
+            <a:srgbClr val="FFFFFF"/>
+          </a:solidFill>
+          <a:ln>
+            <a:noFill/>
+          </a:ln>
+        </p:spPr>
+        <p:style>
+          <a:lnRef idx="1">
+            <a:schemeClr val="accent1"/>
+          </a:lnRef>
+          <a:fillRef idx="3">
+            <a:schemeClr val="accent1"/>
+          </a:fillRef>
+          <a:effectRef idx="2">
+            <a:schemeClr val="accent1"/>
+          </a:effectRef>
+          <a:fontRef idx="minor">
+            <a:schemeClr val="lt1"/>
+          </a:fontRef>
+        </p:style>
+        <p:txBody>
+          <a:bodyPr rtlCol="0" anchor="ctr"/>
+          <a:lstStyle/>
+          <a:p>
+            <a:pPr algn="ctr"/>
+          </a:p>
+        </p:txBody>
+      </p:sp>
       <p:pic>
         <p:nvPicPr>
-          <p:cNvPr id="7" name="Picture 6" descr="title_fill.jpg"/>
+          <p:cNvPr id="6" name="Picture 5" descr="102472.jpg"/>
+          <p:cNvPicPr>
+            <a:picLocks noChangeAspect="1"/>
+          </p:cNvPicPr>
+          <p:nvPr/>
+        </p:nvPicPr>
+        <p:blipFill>
+          <a:blip r:embed="rId2"/>
+          <a:stretch>
+            <a:fillRect/>
+          </a:stretch>
+        </p:blipFill>
+        <p:spPr>
+          <a:xfrm>
+            <a:off x="536448" y="1280160"/>
+            <a:ext cx="5547360" cy="4160520"/>
+          </a:xfrm>
+          <a:prstGeom prst="rect">
+            <a:avLst/>
+          </a:prstGeom>
+        </p:spPr>
+      </p:pic>
+      <p:sp>
+        <p:nvSpPr>
+          <p:cNvPr id="7" name="TextBox 6"/>
+          <p:cNvSpPr txBox="1"/>
+          <p:nvPr/>
+        </p:nvSpPr>
+        <p:spPr>
+          <a:xfrm>
+            <a:off x="347472" y="5596128"/>
+            <a:ext cx="5943600" cy="1097280"/>
+          </a:xfrm>
+          <a:prstGeom prst="rect">
+            <a:avLst/>
+          </a:prstGeom>
+          <a:noFill/>
+        </p:spPr>
+        <p:txBody>
+          <a:bodyPr wrap="square" lIns="54864" rIns="54864" tIns="18288" bIns="18288"/>
+          <a:lstStyle/>
+          <a:p>
+            <a:pPr algn="l">
+              <a:lnSpc>
+                <a:spcPct val="100000"/>
+              </a:lnSpc>
+              <a:spcAft>
+                <a:spcPts val="600"/>
+              </a:spcAft>
+            </a:pPr>
+            <a:r>
+              <a:rPr sz="1200" b="0">
+                <a:solidFill>
+                  <a:srgbClr val="4E5E56"/>
+                </a:solidFill>
+                <a:latin typeface="Arial"/>
+                <a:cs typeface="Arial"/>
+                <a:ea typeface="Arial"/>
+              </a:rPr>
+              <a:t>Детская площадка у сквера, начало Юбилейного проспекта. Фото: stvo99, FotoTerra.ru, CC BY 3.0.</a:t>
+            </a:r>
+          </a:p>
+        </p:txBody>
+      </p:sp>
+      <p:sp>
+        <p:nvSpPr>
+          <p:cNvPr id="8" name="TextBox 7"/>
+          <p:cNvSpPr txBox="1"/>
+          <p:nvPr/>
+        </p:nvSpPr>
+        <p:spPr>
+          <a:xfrm>
+            <a:off x="6492240" y="1280160"/>
+            <a:ext cx="5394960" cy="5120640"/>
+          </a:xfrm>
+          <a:prstGeom prst="rect">
+            <a:avLst/>
+          </a:prstGeom>
+          <a:noFill/>
+        </p:spPr>
+        <p:txBody>
+          <a:bodyPr wrap="square" lIns="54864" rIns="54864" tIns="18288" bIns="18288"/>
+          <a:lstStyle/>
+          <a:p>
+            <a:pPr algn="l">
+              <a:lnSpc>
+                <a:spcPct val="102000"/>
+              </a:lnSpc>
+              <a:spcAft>
+                <a:spcPts val="600"/>
+              </a:spcAft>
+            </a:pPr>
+            <a:r>
+              <a:rPr sz="2200" b="0">
+                <a:solidFill>
+                  <a:srgbClr val="1C2B24"/>
+                </a:solidFill>
+                <a:latin typeface="Arial"/>
+                <a:cs typeface="Arial"/>
+                <a:ea typeface="Arial"/>
+              </a:rPr>
+              <a:t>•  Титова Ева, 3 класс, город Химки.</a:t>
+            </a:r>
+          </a:p>
+          <a:p>
+            <a:pPr algn="l">
+              <a:lnSpc>
+                <a:spcPct val="102000"/>
+              </a:lnSpc>
+              <a:spcAft>
+                <a:spcPts val="600"/>
+              </a:spcAft>
+            </a:pPr>
+            <a:r>
+              <a:rPr sz="2200" b="0">
+                <a:solidFill>
+                  <a:srgbClr val="1C2B24"/>
+                </a:solidFill>
+                <a:latin typeface="Arial"/>
+                <a:cs typeface="Arial"/>
+                <a:ea typeface="Arial"/>
+              </a:rPr>
+              <a:t>•  Парк Толстого, реку Москву и канал в классе уже разобрали.</a:t>
+            </a:r>
+          </a:p>
+          <a:p>
+            <a:pPr algn="l">
+              <a:lnSpc>
+                <a:spcPct val="102000"/>
+              </a:lnSpc>
+              <a:spcAft>
+                <a:spcPts val="600"/>
+              </a:spcAft>
+            </a:pPr>
+            <a:r>
+              <a:rPr sz="2200" b="0">
+                <a:solidFill>
+                  <a:srgbClr val="1C2B24"/>
+                </a:solidFill>
+                <a:latin typeface="Arial"/>
+                <a:cs typeface="Arial"/>
+                <a:ea typeface="Arial"/>
+              </a:rPr>
+              <a:t>•  Буквы на площадке складываются в слово «Химки».</a:t>
+            </a:r>
+          </a:p>
+          <a:p>
+            <a:pPr algn="l">
+              <a:lnSpc>
+                <a:spcPct val="102000"/>
+              </a:lnSpc>
+              <a:spcAft>
+                <a:spcPts val="600"/>
+              </a:spcAft>
+            </a:pPr>
+            <a:r>
+              <a:rPr sz="2200" b="0">
+                <a:solidFill>
+                  <a:srgbClr val="1C2B24"/>
+                </a:solidFill>
+                <a:latin typeface="Arial"/>
+                <a:cs typeface="Arial"/>
+                <a:ea typeface="Arial"/>
+              </a:rPr>
+              <a:t>•  Есть горки, фонтан и скейт-парк 2024 года.</a:t>
+            </a:r>
+          </a:p>
+        </p:txBody>
+      </p:sp>
+    </p:spTree>
+  </p:cSld>
+  <p:clrMapOvr>
+    <a:masterClrMapping/>
+  </p:clrMapOvr>
+</p:sld>
+</file>
+
+<file path=ppt/slides/slide10.xml><?xml version="1.0" encoding="utf-8"?>
+<p:sld xmlns:a="http://schemas.openxmlformats.org/drawingml/2006/main" xmlns:p="http://schemas.openxmlformats.org/presentationml/2006/main" xmlns:r="http://schemas.openxmlformats.org/officeDocument/2006/relationships">
+  <p:cSld>
+    <p:spTree>
+      <p:nvGrpSpPr>
+        <p:cNvPr id="1" name=""/>
+        <p:cNvGrpSpPr/>
+        <p:nvPr/>
+      </p:nvGrpSpPr>
+      <p:grpSpPr/>
+      <p:sp>
+        <p:nvSpPr>
+          <p:cNvPr id="2" name="Rectangle 1"/>
+          <p:cNvSpPr/>
+          <p:nvPr/>
+        </p:nvSpPr>
+        <p:spPr>
+          <a:xfrm>
+            <a:off x="0" y="0"/>
+            <a:ext cx="12191695" cy="6858000"/>
+          </a:xfrm>
+          <a:prstGeom prst="rect">
+            <a:avLst/>
+          </a:prstGeom>
+          <a:solidFill>
+            <a:srgbClr val="F6F3EA"/>
+          </a:solidFill>
+          <a:ln>
+            <a:noFill/>
+          </a:ln>
+        </p:spPr>
+        <p:style>
+          <a:lnRef idx="1">
+            <a:schemeClr val="accent1"/>
+          </a:lnRef>
+          <a:fillRef idx="3">
+            <a:schemeClr val="accent1"/>
+          </a:fillRef>
+          <a:effectRef idx="2">
+            <a:schemeClr val="accent1"/>
+          </a:effectRef>
+          <a:fontRef idx="minor">
+            <a:schemeClr val="lt1"/>
+          </a:fontRef>
+        </p:style>
+        <p:txBody>
+          <a:bodyPr rtlCol="0" anchor="ctr"/>
+          <a:lstStyle/>
+          <a:p>
+            <a:pPr algn="ctr"/>
+          </a:p>
+        </p:txBody>
+      </p:sp>
+      <p:sp>
+        <p:nvSpPr>
+          <p:cNvPr id="3" name="Rectangle 2"/>
+          <p:cNvSpPr/>
+          <p:nvPr/>
+        </p:nvSpPr>
+        <p:spPr>
+          <a:xfrm>
+            <a:off x="0" y="0"/>
+            <a:ext cx="12191695" cy="960120"/>
+          </a:xfrm>
+          <a:prstGeom prst="rect">
+            <a:avLst/>
+          </a:prstGeom>
+          <a:solidFill>
+            <a:srgbClr val="1B5E45"/>
+          </a:solidFill>
+          <a:ln>
+            <a:noFill/>
+          </a:ln>
+        </p:spPr>
+        <p:style>
+          <a:lnRef idx="1">
+            <a:schemeClr val="accent1"/>
+          </a:lnRef>
+          <a:fillRef idx="3">
+            <a:schemeClr val="accent1"/>
+          </a:fillRef>
+          <a:effectRef idx="2">
+            <a:schemeClr val="accent1"/>
+          </a:effectRef>
+          <a:fontRef idx="minor">
+            <a:schemeClr val="lt1"/>
+          </a:fontRef>
+        </p:style>
+        <p:txBody>
+          <a:bodyPr rtlCol="0" anchor="ctr"/>
+          <a:lstStyle/>
+          <a:p>
+            <a:pPr algn="ctr"/>
+          </a:p>
+        </p:txBody>
+      </p:sp>
+      <p:sp>
+        <p:nvSpPr>
+          <p:cNvPr id="4" name="TextBox 3"/>
+          <p:cNvSpPr txBox="1"/>
+          <p:nvPr/>
+        </p:nvSpPr>
+        <p:spPr>
+          <a:xfrm>
+            <a:off x="365760" y="164592"/>
+            <a:ext cx="11338560" cy="658368"/>
+          </a:xfrm>
+          <a:prstGeom prst="rect">
+            <a:avLst/>
+          </a:prstGeom>
+          <a:noFill/>
+        </p:spPr>
+        <p:txBody>
+          <a:bodyPr wrap="square" lIns="54864" rIns="54864" tIns="18288" bIns="18288"/>
+          <a:lstStyle/>
+          <a:p>
+            <a:pPr algn="l">
+              <a:lnSpc>
+                <a:spcPct val="100000"/>
+              </a:lnSpc>
+              <a:spcAft>
+                <a:spcPts val="600"/>
+              </a:spcAft>
+            </a:pPr>
+            <a:r>
+              <a:rPr sz="3000" b="1">
+                <a:solidFill>
+                  <a:srgbClr val="FFFFFF"/>
+                </a:solidFill>
+                <a:latin typeface="Arial"/>
+                <a:cs typeface="Arial"/>
+                <a:ea typeface="Arial"/>
+              </a:rPr>
+              <a:t>Памятник «Доблесть и слава»</a:t>
+            </a:r>
+          </a:p>
+        </p:txBody>
+      </p:sp>
+      <p:sp>
+        <p:nvSpPr>
+          <p:cNvPr id="5" name="Rectangle 4"/>
+          <p:cNvSpPr/>
+          <p:nvPr/>
+        </p:nvSpPr>
+        <p:spPr>
+          <a:xfrm>
+            <a:off x="292608" y="1170432"/>
+            <a:ext cx="6035040" cy="4800600"/>
+          </a:xfrm>
+          <a:prstGeom prst="rect">
+            <a:avLst/>
+          </a:prstGeom>
+          <a:solidFill>
+            <a:srgbClr val="FFFFFF"/>
+          </a:solidFill>
+          <a:ln>
+            <a:noFill/>
+          </a:ln>
+        </p:spPr>
+        <p:style>
+          <a:lnRef idx="1">
+            <a:schemeClr val="accent1"/>
+          </a:lnRef>
+          <a:fillRef idx="3">
+            <a:schemeClr val="accent1"/>
+          </a:fillRef>
+          <a:effectRef idx="2">
+            <a:schemeClr val="accent1"/>
+          </a:effectRef>
+          <a:fontRef idx="minor">
+            <a:schemeClr val="lt1"/>
+          </a:fontRef>
+        </p:style>
+        <p:txBody>
+          <a:bodyPr rtlCol="0" anchor="ctr"/>
+          <a:lstStyle/>
+          <a:p>
+            <a:pPr algn="ctr"/>
+          </a:p>
+        </p:txBody>
+      </p:sp>
+      <p:pic>
+        <p:nvPicPr>
+          <p:cNvPr id="6" name="Picture 5" descr="102476.jpg"/>
+          <p:cNvPicPr>
+            <a:picLocks noChangeAspect="1"/>
+          </p:cNvPicPr>
+          <p:nvPr/>
+        </p:nvPicPr>
+        <p:blipFill>
+          <a:blip r:embed="rId2"/>
+          <a:stretch>
+            <a:fillRect/>
+          </a:stretch>
+        </p:blipFill>
+        <p:spPr>
+          <a:xfrm>
+            <a:off x="536448" y="1280160"/>
+            <a:ext cx="5547360" cy="4160520"/>
+          </a:xfrm>
+          <a:prstGeom prst="rect">
+            <a:avLst/>
+          </a:prstGeom>
+        </p:spPr>
+      </p:pic>
+      <p:sp>
+        <p:nvSpPr>
+          <p:cNvPr id="7" name="TextBox 6"/>
+          <p:cNvSpPr txBox="1"/>
+          <p:nvPr/>
+        </p:nvSpPr>
+        <p:spPr>
+          <a:xfrm>
+            <a:off x="347472" y="5596128"/>
+            <a:ext cx="5943600" cy="1097280"/>
+          </a:xfrm>
+          <a:prstGeom prst="rect">
+            <a:avLst/>
+          </a:prstGeom>
+          <a:noFill/>
+        </p:spPr>
+        <p:txBody>
+          <a:bodyPr wrap="square" lIns="54864" rIns="54864" tIns="18288" bIns="18288"/>
+          <a:lstStyle/>
+          <a:p>
+            <a:pPr algn="l">
+              <a:lnSpc>
+                <a:spcPct val="100000"/>
+              </a:lnSpc>
+              <a:spcAft>
+                <a:spcPts val="600"/>
+              </a:spcAft>
+            </a:pPr>
+            <a:r>
+              <a:rPr sz="1200" b="0">
+                <a:solidFill>
+                  <a:srgbClr val="4E5E56"/>
+                </a:solidFill>
+                <a:latin typeface="Arial"/>
+                <a:cs typeface="Arial"/>
+                <a:ea typeface="Arial"/>
+              </a:rPr>
+              <a:t>Мемориал в сквере имени Марии Рубцовой. Фото: stvo99, FotoTerra.ru, CC BY 3.0.</a:t>
+            </a:r>
+          </a:p>
+        </p:txBody>
+      </p:sp>
+      <p:sp>
+        <p:nvSpPr>
+          <p:cNvPr id="8" name="TextBox 7"/>
+          <p:cNvSpPr txBox="1"/>
+          <p:nvPr/>
+        </p:nvSpPr>
+        <p:spPr>
+          <a:xfrm>
+            <a:off x="6492240" y="1280160"/>
+            <a:ext cx="5394960" cy="5120640"/>
+          </a:xfrm>
+          <a:prstGeom prst="rect">
+            <a:avLst/>
+          </a:prstGeom>
+          <a:noFill/>
+        </p:spPr>
+        <p:txBody>
+          <a:bodyPr wrap="square" lIns="54864" rIns="54864" tIns="18288" bIns="18288"/>
+          <a:lstStyle/>
+          <a:p>
+            <a:pPr algn="l">
+              <a:lnSpc>
+                <a:spcPct val="102000"/>
+              </a:lnSpc>
+              <a:spcAft>
+                <a:spcPts val="600"/>
+              </a:spcAft>
+            </a:pPr>
+            <a:r>
+              <a:rPr sz="2200" b="0">
+                <a:solidFill>
+                  <a:srgbClr val="1C2B24"/>
+                </a:solidFill>
+                <a:latin typeface="Arial"/>
+                <a:cs typeface="Arial"/>
+                <a:ea typeface="Arial"/>
+              </a:rPr>
+              <a:t>•  Открыт 8 сентября 2007 года.</a:t>
+            </a:r>
+          </a:p>
+          <a:p>
+            <a:pPr algn="l">
+              <a:lnSpc>
+                <a:spcPct val="102000"/>
+              </a:lnSpc>
+              <a:spcAft>
+                <a:spcPts val="600"/>
+              </a:spcAft>
+            </a:pPr>
+            <a:r>
+              <a:rPr sz="2200" b="0">
+                <a:solidFill>
+                  <a:srgbClr val="1C2B24"/>
+                </a:solidFill>
+                <a:latin typeface="Arial"/>
+                <a:cs typeface="Arial"/>
+                <a:ea typeface="Arial"/>
+              </a:rPr>
+              <a:t>•  Он в память о воинах особых военных отрядов.</a:t>
+            </a:r>
+          </a:p>
+          <a:p>
+            <a:pPr algn="l">
+              <a:lnSpc>
+                <a:spcPct val="102000"/>
+              </a:lnSpc>
+              <a:spcAft>
+                <a:spcPts val="600"/>
+              </a:spcAft>
+            </a:pPr>
+            <a:r>
+              <a:rPr sz="2200" b="0">
+                <a:solidFill>
+                  <a:srgbClr val="1C2B24"/>
+                </a:solidFill>
+                <a:latin typeface="Arial"/>
+                <a:cs typeface="Arial"/>
+                <a:ea typeface="Arial"/>
+              </a:rPr>
+              <a:t>•  У входа с Юбилейного проспекта лежит камень к 60-летию Победы.</a:t>
+            </a:r>
+          </a:p>
+        </p:txBody>
+      </p:sp>
+    </p:spTree>
+  </p:cSld>
+  <p:clrMapOvr>
+    <a:masterClrMapping/>
+  </p:clrMapOvr>
+</p:sld>
+</file>
+
+<file path=ppt/slides/slide11.xml><?xml version="1.0" encoding="utf-8"?>
+<p:sld xmlns:a="http://schemas.openxmlformats.org/drawingml/2006/main" xmlns:p="http://schemas.openxmlformats.org/presentationml/2006/main" xmlns:r="http://schemas.openxmlformats.org/officeDocument/2006/relationships">
+  <p:cSld>
+    <p:spTree>
+      <p:nvGrpSpPr>
+        <p:cNvPr id="1" name=""/>
+        <p:cNvGrpSpPr/>
+        <p:nvPr/>
+      </p:nvGrpSpPr>
+      <p:grpSpPr/>
+      <p:sp>
+        <p:nvSpPr>
+          <p:cNvPr id="2" name="Rectangle 1"/>
+          <p:cNvSpPr/>
+          <p:nvPr/>
+        </p:nvSpPr>
+        <p:spPr>
+          <a:xfrm>
+            <a:off x="0" y="0"/>
+            <a:ext cx="12191695" cy="6858000"/>
+          </a:xfrm>
+          <a:prstGeom prst="rect">
+            <a:avLst/>
+          </a:prstGeom>
+          <a:solidFill>
+            <a:srgbClr val="F6F3EA"/>
+          </a:solidFill>
+          <a:ln>
+            <a:noFill/>
+          </a:ln>
+        </p:spPr>
+        <p:style>
+          <a:lnRef idx="1">
+            <a:schemeClr val="accent1"/>
+          </a:lnRef>
+          <a:fillRef idx="3">
+            <a:schemeClr val="accent1"/>
+          </a:fillRef>
+          <a:effectRef idx="2">
+            <a:schemeClr val="accent1"/>
+          </a:effectRef>
+          <a:fontRef idx="minor">
+            <a:schemeClr val="lt1"/>
+          </a:fontRef>
+        </p:style>
+        <p:txBody>
+          <a:bodyPr rtlCol="0" anchor="ctr"/>
+          <a:lstStyle/>
+          <a:p>
+            <a:pPr algn="ctr"/>
+          </a:p>
+        </p:txBody>
+      </p:sp>
+      <p:sp>
+        <p:nvSpPr>
+          <p:cNvPr id="3" name="Rectangle 2"/>
+          <p:cNvSpPr/>
+          <p:nvPr/>
+        </p:nvSpPr>
+        <p:spPr>
+          <a:xfrm>
+            <a:off x="0" y="0"/>
+            <a:ext cx="12191695" cy="960120"/>
+          </a:xfrm>
+          <a:prstGeom prst="rect">
+            <a:avLst/>
+          </a:prstGeom>
+          <a:solidFill>
+            <a:srgbClr val="1B5E45"/>
+          </a:solidFill>
+          <a:ln>
+            <a:noFill/>
+          </a:ln>
+        </p:spPr>
+        <p:style>
+          <a:lnRef idx="1">
+            <a:schemeClr val="accent1"/>
+          </a:lnRef>
+          <a:fillRef idx="3">
+            <a:schemeClr val="accent1"/>
+          </a:fillRef>
+          <a:effectRef idx="2">
+            <a:schemeClr val="accent1"/>
+          </a:effectRef>
+          <a:fontRef idx="minor">
+            <a:schemeClr val="lt1"/>
+          </a:fontRef>
+        </p:style>
+        <p:txBody>
+          <a:bodyPr rtlCol="0" anchor="ctr"/>
+          <a:lstStyle/>
+          <a:p>
+            <a:pPr algn="ctr"/>
+          </a:p>
+        </p:txBody>
+      </p:sp>
+      <p:sp>
+        <p:nvSpPr>
+          <p:cNvPr id="4" name="TextBox 3"/>
+          <p:cNvSpPr txBox="1"/>
+          <p:nvPr/>
+        </p:nvSpPr>
+        <p:spPr>
+          <a:xfrm>
+            <a:off x="365760" y="164592"/>
+            <a:ext cx="11338560" cy="658368"/>
+          </a:xfrm>
+          <a:prstGeom prst="rect">
+            <a:avLst/>
+          </a:prstGeom>
+          <a:noFill/>
+        </p:spPr>
+        <p:txBody>
+          <a:bodyPr wrap="square" lIns="54864" rIns="54864" tIns="18288" bIns="18288"/>
+          <a:lstStyle/>
+          <a:p>
+            <a:pPr algn="l">
+              <a:lnSpc>
+                <a:spcPct val="100000"/>
+              </a:lnSpc>
+              <a:spcAft>
+                <a:spcPts val="600"/>
+              </a:spcAft>
+            </a:pPr>
+            <a:r>
+              <a:rPr sz="3000" b="1">
+                <a:solidFill>
+                  <a:srgbClr val="FFFFFF"/>
+                </a:solidFill>
+                <a:latin typeface="Arial"/>
+                <a:cs typeface="Arial"/>
+                <a:ea typeface="Arial"/>
+              </a:rPr>
+              <a:t>Детские площадки во дворах</a:t>
+            </a:r>
+          </a:p>
+        </p:txBody>
+      </p:sp>
+      <p:sp>
+        <p:nvSpPr>
+          <p:cNvPr id="5" name="Rectangle 4"/>
+          <p:cNvSpPr/>
+          <p:nvPr/>
+        </p:nvSpPr>
+        <p:spPr>
+          <a:xfrm>
+            <a:off x="292608" y="1170432"/>
+            <a:ext cx="6035040" cy="4800600"/>
+          </a:xfrm>
+          <a:prstGeom prst="rect">
+            <a:avLst/>
+          </a:prstGeom>
+          <a:solidFill>
+            <a:srgbClr val="FFFFFF"/>
+          </a:solidFill>
+          <a:ln>
+            <a:noFill/>
+          </a:ln>
+        </p:spPr>
+        <p:style>
+          <a:lnRef idx="1">
+            <a:schemeClr val="accent1"/>
+          </a:lnRef>
+          <a:fillRef idx="3">
+            <a:schemeClr val="accent1"/>
+          </a:fillRef>
+          <a:effectRef idx="2">
+            <a:schemeClr val="accent1"/>
+          </a:effectRef>
+          <a:fontRef idx="minor">
+            <a:schemeClr val="lt1"/>
+          </a:fontRef>
+        </p:style>
+        <p:txBody>
+          <a:bodyPr rtlCol="0" anchor="ctr"/>
+          <a:lstStyle/>
+          <a:p>
+            <a:pPr algn="ctr"/>
+          </a:p>
+        </p:txBody>
+      </p:sp>
+      <p:sp>
+        <p:nvSpPr>
+          <p:cNvPr id="7" name="TextBox 6"/>
+          <p:cNvSpPr txBox="1"/>
+          <p:nvPr/>
+        </p:nvSpPr>
+        <p:spPr>
+          <a:xfrm>
+            <a:off x="347472" y="5596128"/>
+            <a:ext cx="5943600" cy="1097280"/>
+          </a:xfrm>
+          <a:prstGeom prst="rect">
+            <a:avLst/>
+          </a:prstGeom>
+          <a:noFill/>
+        </p:spPr>
+        <p:txBody>
+          <a:bodyPr wrap="square" lIns="54864" rIns="54864" tIns="18288" bIns="18288"/>
+          <a:lstStyle/>
+          <a:p>
+            <a:pPr algn="l">
+              <a:lnSpc>
+                <a:spcPct val="100000"/>
+              </a:lnSpc>
+              <a:spcAft>
+                <a:spcPts val="600"/>
+              </a:spcAft>
+            </a:pPr>
+            <a:r>
+              <a:rPr sz="1200" b="0">
+                <a:solidFill>
+                  <a:srgbClr val="4E5E56"/>
+                </a:solidFill>
+                <a:latin typeface="Arial"/>
+                <a:cs typeface="Arial"/>
+                <a:ea typeface="Arial"/>
+              </a:rPr>
+              <a:t>Двор в Старых Химках. Фото: stvo99, FotoTerra.ru, CC BY 3.0.</a:t>
+            </a:r>
+          </a:p>
+        </p:txBody>
+      </p:sp>
+      <p:sp>
+        <p:nvSpPr>
+          <p:cNvPr id="8" name="TextBox 7"/>
+          <p:cNvSpPr txBox="1"/>
+          <p:nvPr/>
+        </p:nvSpPr>
+        <p:spPr>
+          <a:xfrm>
+            <a:off x="6492240" y="1280160"/>
+            <a:ext cx="5394960" cy="5120640"/>
+          </a:xfrm>
+          <a:prstGeom prst="rect">
+            <a:avLst/>
+          </a:prstGeom>
+          <a:noFill/>
+        </p:spPr>
+        <p:txBody>
+          <a:bodyPr wrap="square" lIns="54864" rIns="54864" tIns="18288" bIns="18288"/>
+          <a:lstStyle/>
+          <a:p>
+            <a:pPr algn="l">
+              <a:lnSpc>
+                <a:spcPct val="102000"/>
+              </a:lnSpc>
+              <a:spcAft>
+                <a:spcPts val="600"/>
+              </a:spcAft>
+            </a:pPr>
+            <a:r>
+              <a:rPr sz="2200" b="0">
+                <a:solidFill>
+                  <a:srgbClr val="1C2B24"/>
+                </a:solidFill>
+                <a:latin typeface="Arial"/>
+                <a:cs typeface="Arial"/>
+                <a:ea typeface="Arial"/>
+              </a:rPr>
+              <a:t>•  Рубцова ставила деревянные площадки в Новых и Старых Химках.</a:t>
+            </a:r>
+          </a:p>
+          <a:p>
+            <a:pPr algn="l">
+              <a:lnSpc>
+                <a:spcPct val="102000"/>
+              </a:lnSpc>
+              <a:spcAft>
+                <a:spcPts val="600"/>
+              </a:spcAft>
+            </a:pPr>
+            <a:r>
+              <a:rPr sz="2200" b="0">
+                <a:solidFill>
+                  <a:srgbClr val="1C2B24"/>
+                </a:solidFill>
+                <a:latin typeface="Arial"/>
+                <a:cs typeface="Arial"/>
+                <a:ea typeface="Arial"/>
+              </a:rPr>
+              <a:t>•  Во дворах города дети играют и сейчас.</a:t>
+            </a:r>
+          </a:p>
+          <a:p>
+            <a:pPr algn="l">
+              <a:lnSpc>
+                <a:spcPct val="102000"/>
+              </a:lnSpc>
+              <a:spcAft>
+                <a:spcPts val="600"/>
+              </a:spcAft>
+            </a:pPr>
+            <a:r>
+              <a:rPr sz="2200" b="0">
+                <a:solidFill>
+                  <a:srgbClr val="1C2B24"/>
+                </a:solidFill>
+                <a:latin typeface="Arial"/>
+                <a:cs typeface="Arial"/>
+                <a:ea typeface="Arial"/>
+              </a:rPr>
+              <a:t>•  Площадка с буквами «Химки» стоит у самого сквера.</a:t>
+            </a:r>
+          </a:p>
+        </p:txBody>
+      </p:sp>
+      <p:pic>
+        <p:nvPicPr>
+          <p:cNvPr id="9" name="Picture 8" descr="102310.jpg"/>
           <p:cNvPicPr>
             <a:picLocks noChangeAspect="1"/>
           </p:cNvPicPr>
@@ -3111,30 +4111,48 @@
         </p:blipFill>
         <p:spPr>
           <a:xfrm>
+            <a:off x="536448" y="1280160"/>
+            <a:ext cx="5547360" cy="4160520"/>
+          </a:xfrm>
+          <a:prstGeom prst="rect">
+            <a:avLst/>
+          </a:prstGeom>
+        </p:spPr>
+      </p:pic>
+    </p:spTree>
+  </p:cSld>
+  <p:clrMapOvr>
+    <a:masterClrMapping/>
+  </p:clrMapOvr>
+</p:sld>
+</file>
+
+<file path=ppt/slides/slide12.xml><?xml version="1.0" encoding="utf-8"?>
+<p:sld xmlns:a="http://schemas.openxmlformats.org/drawingml/2006/main" xmlns:p="http://schemas.openxmlformats.org/presentationml/2006/main" xmlns:r="http://schemas.openxmlformats.org/officeDocument/2006/relationships">
+  <p:cSld>
+    <p:spTree>
+      <p:nvGrpSpPr>
+        <p:cNvPr id="1" name=""/>
+        <p:cNvGrpSpPr/>
+        <p:nvPr/>
+      </p:nvGrpSpPr>
+      <p:grpSpPr/>
+      <p:sp>
+        <p:nvSpPr>
+          <p:cNvPr id="2" name="Rectangle 1"/>
+          <p:cNvSpPr/>
+          <p:nvPr/>
+        </p:nvSpPr>
+        <p:spPr>
+          <a:xfrm>
             <a:off x="0" y="0"/>
             <a:ext cx="12191695" cy="6858000"/>
           </a:xfrm>
           <a:prstGeom prst="rect">
             <a:avLst/>
           </a:prstGeom>
-        </p:spPr>
-      </p:pic>
-      <p:sp>
-        <p:nvSpPr>
-          <p:cNvPr id="3" name="Rectangle 2"/>
-          <p:cNvSpPr/>
-          <p:nvPr/>
-        </p:nvSpPr>
-        <p:spPr>
-          <a:xfrm>
-            <a:off x="0" y="4160520"/>
-            <a:ext cx="12191695" cy="2697480"/>
-          </a:xfrm>
-          <a:prstGeom prst="rect">
-            <a:avLst/>
-          </a:prstGeom>
           <a:solidFill>
-            <a:srgbClr val="143D2E"/>
+            <a:srgbClr val="F6F3EA"/>
           </a:solidFill>
           <a:ln>
             <a:noFill/>
@@ -3164,14 +4182,57 @@
       </p:sp>
       <p:sp>
         <p:nvSpPr>
+          <p:cNvPr id="3" name="Rectangle 2"/>
+          <p:cNvSpPr/>
+          <p:nvPr/>
+        </p:nvSpPr>
+        <p:spPr>
+          <a:xfrm>
+            <a:off x="0" y="0"/>
+            <a:ext cx="12191695" cy="960120"/>
+          </a:xfrm>
+          <a:prstGeom prst="rect">
+            <a:avLst/>
+          </a:prstGeom>
+          <a:solidFill>
+            <a:srgbClr val="1B5E45"/>
+          </a:solidFill>
+          <a:ln>
+            <a:noFill/>
+          </a:ln>
+        </p:spPr>
+        <p:style>
+          <a:lnRef idx="1">
+            <a:schemeClr val="accent1"/>
+          </a:lnRef>
+          <a:fillRef idx="3">
+            <a:schemeClr val="accent1"/>
+          </a:fillRef>
+          <a:effectRef idx="2">
+            <a:schemeClr val="accent1"/>
+          </a:effectRef>
+          <a:fontRef idx="minor">
+            <a:schemeClr val="lt1"/>
+          </a:fontRef>
+        </p:style>
+        <p:txBody>
+          <a:bodyPr rtlCol="0" anchor="ctr"/>
+          <a:lstStyle/>
+          <a:p>
+            <a:pPr algn="ctr"/>
+          </a:p>
+        </p:txBody>
+      </p:sp>
+      <p:sp>
+        <p:nvSpPr>
           <p:cNvPr id="4" name="TextBox 3"/>
           <p:cNvSpPr txBox="1"/>
           <p:nvPr/>
         </p:nvSpPr>
         <p:spPr>
           <a:xfrm>
-            <a:off x="502920" y="4297680"/>
-            <a:ext cx="11155680" cy="411480"/>
+            <a:off x="365760" y="164592"/>
+            <a:ext cx="11338560" cy="658368"/>
           </a:xfrm>
           <a:prstGeom prst="rect">
             <a:avLst/>
@@ -3179,7 +4240,7 @@
           <a:noFill/>
         </p:spPr>
         <p:txBody>
-          <a:bodyPr wrap="square" lIns="73152" rIns="73152" tIns="36576" bIns="36576" anchor="t"/>
+          <a:bodyPr wrap="square" lIns="54864" rIns="54864" tIns="18288" bIns="18288"/>
           <a:lstStyle/>
           <a:p>
             <a:pPr algn="l">
@@ -3187,33 +4248,76 @@
                 <a:spcPct val="100000"/>
               </a:lnSpc>
               <a:spcAft>
-                <a:spcPts val="800"/>
+                <a:spcPts val="600"/>
               </a:spcAft>
             </a:pPr>
             <a:r>
-              <a:rPr sz="1600" b="0">
-                <a:solidFill>
-                  <a:srgbClr val="D7EBDF"/>
+              <a:rPr sz="3000" b="1">
+                <a:solidFill>
+                  <a:srgbClr val="FFFFFF"/>
                 </a:solidFill>
                 <a:latin typeface="Arial"/>
                 <a:cs typeface="Arial"/>
                 <a:ea typeface="Arial"/>
               </a:rPr>
-              <a:t>Реферат. Город Химки</a:t>
-            </a:r>
-          </a:p>
-        </p:txBody>
-      </p:sp>
-      <p:sp>
-        <p:nvSpPr>
-          <p:cNvPr id="5" name="TextBox 4"/>
+              <a:t>Почему я выбрала этот сквер</a:t>
+            </a:r>
+          </a:p>
+        </p:txBody>
+      </p:sp>
+      <p:sp>
+        <p:nvSpPr>
+          <p:cNvPr id="5" name="Rectangle 4"/>
+          <p:cNvSpPr/>
+          <p:nvPr/>
+        </p:nvSpPr>
+        <p:spPr>
+          <a:xfrm>
+            <a:off x="292608" y="1170432"/>
+            <a:ext cx="6035040" cy="4800600"/>
+          </a:xfrm>
+          <a:prstGeom prst="rect">
+            <a:avLst/>
+          </a:prstGeom>
+          <a:solidFill>
+            <a:srgbClr val="FFFFFF"/>
+          </a:solidFill>
+          <a:ln>
+            <a:noFill/>
+          </a:ln>
+        </p:spPr>
+        <p:style>
+          <a:lnRef idx="1">
+            <a:schemeClr val="accent1"/>
+          </a:lnRef>
+          <a:fillRef idx="3">
+            <a:schemeClr val="accent1"/>
+          </a:fillRef>
+          <a:effectRef idx="2">
+            <a:schemeClr val="accent1"/>
+          </a:effectRef>
+          <a:fontRef idx="minor">
+            <a:schemeClr val="lt1"/>
+          </a:fontRef>
+        </p:style>
+        <p:txBody>
+          <a:bodyPr rtlCol="0" anchor="ctr"/>
+          <a:lstStyle/>
+          <a:p>
+            <a:pPr algn="ctr"/>
+          </a:p>
+        </p:txBody>
+      </p:sp>
+      <p:sp>
+        <p:nvSpPr>
+          <p:cNvPr id="7" name="TextBox 6"/>
           <p:cNvSpPr txBox="1"/>
           <p:nvPr/>
         </p:nvSpPr>
         <p:spPr>
           <a:xfrm>
-            <a:off x="502920" y="4617720"/>
-            <a:ext cx="11155680" cy="1051560"/>
+            <a:off x="347472" y="5596128"/>
+            <a:ext cx="5943600" cy="1097280"/>
           </a:xfrm>
           <a:prstGeom prst="rect">
             <a:avLst/>
@@ -3221,7 +4325,7 @@
           <a:noFill/>
         </p:spPr>
         <p:txBody>
-          <a:bodyPr wrap="square" lIns="73152" rIns="73152" tIns="36576" bIns="36576" anchor="t"/>
+          <a:bodyPr wrap="square" lIns="54864" rIns="54864" tIns="18288" bIns="18288"/>
           <a:lstStyle/>
           <a:p>
             <a:pPr algn="l">
@@ -3229,33 +4333,33 @@
                 <a:spcPct val="100000"/>
               </a:lnSpc>
               <a:spcAft>
-                <a:spcPts val="800"/>
+                <a:spcPts val="600"/>
               </a:spcAft>
             </a:pPr>
             <a:r>
-              <a:rPr sz="4000" b="1">
-                <a:solidFill>
-                  <a:srgbClr val="FFFFFF"/>
+              <a:rPr sz="1200" b="0">
+                <a:solidFill>
+                  <a:srgbClr val="4E5E56"/>
                 </a:solidFill>
                 <a:latin typeface="Arial"/>
                 <a:cs typeface="Arial"/>
                 <a:ea typeface="Arial"/>
               </a:rPr>
-              <a:t>Сквер имени Марии Рубцовой</a:t>
-            </a:r>
-          </a:p>
-        </p:txBody>
-      </p:sp>
-      <p:sp>
-        <p:nvSpPr>
-          <p:cNvPr id="6" name="TextBox 5"/>
+              <a:t>Зелёная улица в Химках. Фото: stvo99, FotoTerra.ru, CC BY 3.0.</a:t>
+            </a:r>
+          </a:p>
+        </p:txBody>
+      </p:sp>
+      <p:sp>
+        <p:nvSpPr>
+          <p:cNvPr id="8" name="TextBox 7"/>
           <p:cNvSpPr txBox="1"/>
           <p:nvPr/>
         </p:nvSpPr>
         <p:spPr>
           <a:xfrm>
-            <a:off x="502920" y="5760720"/>
-            <a:ext cx="11155680" cy="822960"/>
+            <a:off x="6492240" y="1280160"/>
+            <a:ext cx="5394960" cy="5120640"/>
           </a:xfrm>
           <a:prstGeom prst="rect">
             <a:avLst/>
@@ -3263,52 +4367,118 @@
           <a:noFill/>
         </p:spPr>
         <p:txBody>
-          <a:bodyPr wrap="square" lIns="73152" rIns="73152" tIns="36576" bIns="36576" anchor="t"/>
+          <a:bodyPr wrap="square" lIns="54864" rIns="54864" tIns="18288" bIns="18288"/>
           <a:lstStyle/>
           <a:p>
             <a:pPr algn="l">
               <a:lnSpc>
-                <a:spcPct val="100000"/>
+                <a:spcPct val="102000"/>
               </a:lnSpc>
               <a:spcAft>
-                <a:spcPts val="800"/>
+                <a:spcPts val="600"/>
               </a:spcAft>
             </a:pPr>
             <a:r>
               <a:rPr sz="2200" b="0">
                 <a:solidFill>
-                  <a:srgbClr val="FFFFFF"/>
+                  <a:srgbClr val="1C2B24"/>
                 </a:solidFill>
                 <a:latin typeface="Arial"/>
                 <a:cs typeface="Arial"/>
                 <a:ea typeface="Arial"/>
               </a:rPr>
-              <a:t>Титова Ева, 3 класс</a:t>
+              <a:t>•  За одну прогулку здесь и парк, и музей под открытым небом.</a:t>
             </a:r>
           </a:p>
           <a:p>
             <a:pPr algn="l">
               <a:lnSpc>
-                <a:spcPct val="100000"/>
+                <a:spcPct val="102000"/>
               </a:lnSpc>
               <a:spcAft>
-                <a:spcPts val="800"/>
+                <a:spcPts val="600"/>
               </a:spcAft>
             </a:pPr>
             <a:r>
-              <a:rPr sz="1200" b="0">
-                <a:solidFill>
-                  <a:srgbClr val="D7EBDF"/>
+              <a:rPr sz="2200" b="0">
+                <a:solidFill>
+                  <a:srgbClr val="1C2B24"/>
                 </a:solidFill>
                 <a:latin typeface="Arial"/>
                 <a:cs typeface="Arial"/>
                 <a:ea typeface="Arial"/>
               </a:rPr>
-              <a:t>Фото: Сергей Себелев, Wikimedia Commons, CC BY-SA 4.0</a:t>
-            </a:r>
-          </a:p>
-        </p:txBody>
-      </p:sp>
+              <a:t>•  Рубцова около 25 лет делала город зелёным.</a:t>
+            </a:r>
+          </a:p>
+          <a:p>
+            <a:pPr algn="l">
+              <a:lnSpc>
+                <a:spcPct val="102000"/>
+              </a:lnSpc>
+              <a:spcAft>
+                <a:spcPts val="600"/>
+              </a:spcAft>
+            </a:pPr>
+            <a:r>
+              <a:rPr sz="2200" b="0">
+                <a:solidFill>
+                  <a:srgbClr val="1C2B24"/>
+                </a:solidFill>
+                <a:latin typeface="Arial"/>
+                <a:cs typeface="Arial"/>
+                <a:ea typeface="Arial"/>
+              </a:rPr>
+              <a:t>•  Семикова встретила Победу в Берлине.</a:t>
+            </a:r>
+          </a:p>
+          <a:p>
+            <a:pPr algn="l">
+              <a:lnSpc>
+                <a:spcPct val="102000"/>
+              </a:lnSpc>
+              <a:spcAft>
+                <a:spcPts val="600"/>
+              </a:spcAft>
+            </a:pPr>
+            <a:r>
+              <a:rPr sz="2200" b="0">
+                <a:solidFill>
+                  <a:srgbClr val="1C2B24"/>
+                </a:solidFill>
+                <a:latin typeface="Arial"/>
+                <a:cs typeface="Arial"/>
+                <a:ea typeface="Arial"/>
+              </a:rPr>
+              <a:t>•  Титова Ева, 3 класс.</a:t>
+            </a:r>
+          </a:p>
+        </p:txBody>
+      </p:sp>
+      <p:pic>
+        <p:nvPicPr>
+          <p:cNvPr id="9" name="Picture 8" descr="image.jpg"/>
+          <p:cNvPicPr>
+            <a:picLocks noChangeAspect="1"/>
+          </p:cNvPicPr>
+          <p:nvPr/>
+        </p:nvPicPr>
+        <p:blipFill>
+          <a:blip r:embed="rId3"/>
+          <a:stretch>
+            <a:fillRect/>
+          </a:stretch>
+        </p:blipFill>
+        <p:spPr>
+          <a:xfrm>
+            <a:off x="536448" y="1280160"/>
+            <a:ext cx="5547360" cy="4160520"/>
+          </a:xfrm>
+          <a:prstGeom prst="rect">
+            <a:avLst/>
+          </a:prstGeom>
+        </p:spPr>
+      </p:pic>
     </p:spTree>
   </p:cSld>
   <p:clrMapOvr>
@@ -3379,7 +4549,7 @@
         <p:spPr>
           <a:xfrm>
             <a:off x="0" y="0"/>
-            <a:ext cx="12191695" cy="1024128"/>
+            <a:ext cx="12191695" cy="960120"/>
           </a:xfrm>
           <a:prstGeom prst="rect">
             <a:avLst/>
@@ -3421,8 +4591,8 @@
         </p:nvSpPr>
         <p:spPr>
           <a:xfrm>
-            <a:off x="365760" y="201168"/>
-            <a:ext cx="11338560" cy="685800"/>
+            <a:off x="365760" y="164592"/>
+            <a:ext cx="11338560" cy="658368"/>
           </a:xfrm>
           <a:prstGeom prst="rect">
             <a:avLst/>
@@ -3430,7 +4600,7 @@
           <a:noFill/>
         </p:spPr>
         <p:txBody>
-          <a:bodyPr wrap="square" lIns="73152" rIns="73152" tIns="36576" bIns="36576" anchor="ctr"/>
+          <a:bodyPr wrap="square" lIns="54864" rIns="54864" tIns="18288" bIns="18288"/>
           <a:lstStyle/>
           <a:p>
             <a:pPr algn="l">
@@ -3438,11 +4608,11 @@
                 <a:spcPct val="100000"/>
               </a:lnSpc>
               <a:spcAft>
-                <a:spcPts val="800"/>
+                <a:spcPts val="600"/>
               </a:spcAft>
             </a:pPr>
             <a:r>
-              <a:rPr sz="3200" b="1">
+              <a:rPr sz="3000" b="1">
                 <a:solidFill>
                   <a:srgbClr val="FFFFFF"/>
                 </a:solidFill>
@@ -3463,8 +4633,8 @@
         </p:nvSpPr>
         <p:spPr>
           <a:xfrm>
-            <a:off x="320040" y="1280160"/>
-            <a:ext cx="5989320" cy="4709160"/>
+            <a:off x="292608" y="1170432"/>
+            <a:ext cx="6035040" cy="4800600"/>
           </a:xfrm>
           <a:prstGeom prst="rect">
             <a:avLst/>
@@ -3498,30 +4668,6 @@
           </a:p>
         </p:txBody>
       </p:sp>
-      <p:pic>
-        <p:nvPicPr>
-          <p:cNvPr id="6" name="Picture 5" descr="path.jpg"/>
-          <p:cNvPicPr>
-            <a:picLocks noChangeAspect="1"/>
-          </p:cNvPicPr>
-          <p:nvPr/>
-        </p:nvPicPr>
-        <p:blipFill>
-          <a:blip r:embed="rId2"/>
-          <a:stretch>
-            <a:fillRect/>
-          </a:stretch>
-        </p:blipFill>
-        <p:spPr>
-          <a:xfrm>
-            <a:off x="848963" y="1389888"/>
-            <a:ext cx="4940617" cy="4160520"/>
-          </a:xfrm>
-          <a:prstGeom prst="rect">
-            <a:avLst/>
-          </a:prstGeom>
-        </p:spPr>
-      </p:pic>
       <p:sp>
         <p:nvSpPr>
           <p:cNvPr id="7" name="TextBox 6"/>
@@ -3530,8 +4676,8 @@
         </p:nvSpPr>
         <p:spPr>
           <a:xfrm>
-            <a:off x="365760" y="5623560"/>
-            <a:ext cx="5943600" cy="1051560"/>
+            <a:off x="347472" y="5596128"/>
+            <a:ext cx="5943600" cy="1097280"/>
           </a:xfrm>
           <a:prstGeom prst="rect">
             <a:avLst/>
@@ -3539,7 +4685,7 @@
           <a:noFill/>
         </p:spPr>
         <p:txBody>
-          <a:bodyPr wrap="square" lIns="73152" rIns="73152" tIns="36576" bIns="36576" anchor="t"/>
+          <a:bodyPr wrap="square" lIns="54864" rIns="54864" tIns="18288" bIns="18288"/>
           <a:lstStyle/>
           <a:p>
             <a:pPr algn="l">
@@ -3547,11 +4693,11 @@
                 <a:spcPct val="100000"/>
               </a:lnSpc>
               <a:spcAft>
-                <a:spcPts val="800"/>
+                <a:spcPts val="600"/>
               </a:spcAft>
             </a:pPr>
             <a:r>
-              <a:rPr sz="1100" b="0">
+              <a:rPr sz="1200" b="0">
                 <a:solidFill>
                   <a:srgbClr val="4E5E56"/>
                 </a:solidFill>
@@ -3559,7 +4705,7 @@
                 <a:cs typeface="Arial"/>
                 <a:ea typeface="Arial"/>
               </a:rPr>
-              <a:t>Фото: Сергей Себелев, Wikimedia Commons, CC BY-SA 4.0.</a:t>
+              <a:t>Вид на Химки. Сквер находится в Новых Химках. Фото: stvo99, FotoTerra.ru, CC BY 3.0.</a:t>
             </a:r>
           </a:p>
         </p:txBody>
@@ -3572,8 +4718,8 @@
         </p:nvSpPr>
         <p:spPr>
           <a:xfrm>
-            <a:off x="6492240" y="1417320"/>
-            <a:ext cx="5349240" cy="4937760"/>
+            <a:off x="6492240" y="1280160"/>
+            <a:ext cx="5394960" cy="5120640"/>
           </a:xfrm>
           <a:prstGeom prst="rect">
             <a:avLst/>
@@ -3581,19 +4727,19 @@
           <a:noFill/>
         </p:spPr>
         <p:txBody>
-          <a:bodyPr wrap="square" lIns="73152" rIns="73152" tIns="36576" bIns="36576" anchor="t"/>
+          <a:bodyPr wrap="square" lIns="54864" rIns="54864" tIns="18288" bIns="18288"/>
           <a:lstStyle/>
           <a:p>
             <a:pPr algn="l">
               <a:lnSpc>
-                <a:spcPct val="105000"/>
+                <a:spcPct val="102000"/>
               </a:lnSpc>
               <a:spcAft>
-                <a:spcPts val="800"/>
+                <a:spcPts val="600"/>
               </a:spcAft>
             </a:pPr>
             <a:r>
-              <a:rPr sz="2400" b="0">
+              <a:rPr sz="2200" b="0">
                 <a:solidFill>
                   <a:srgbClr val="1C2B24"/>
                 </a:solidFill>
@@ -3601,20 +4747,20 @@
                 <a:cs typeface="Arial"/>
                 <a:ea typeface="Arial"/>
               </a:rPr>
-              <a:t>•  Это Новые Химки.</a:t>
+              <a:t>•  Это Новые Химки, у Ленинградского шоссе.</a:t>
             </a:r>
           </a:p>
           <a:p>
             <a:pPr algn="l">
               <a:lnSpc>
-                <a:spcPct val="105000"/>
+                <a:spcPct val="102000"/>
               </a:lnSpc>
               <a:spcAft>
-                <a:spcPts val="800"/>
+                <a:spcPts val="600"/>
               </a:spcAft>
             </a:pPr>
             <a:r>
-              <a:rPr sz="2400" b="0">
+              <a:rPr sz="2200" b="0">
                 <a:solidFill>
                   <a:srgbClr val="1C2B24"/>
                 </a:solidFill>
@@ -3622,20 +4768,20 @@
                 <a:cs typeface="Arial"/>
                 <a:ea typeface="Arial"/>
               </a:rPr>
-              <a:t>•  Сквер лежит между Ленинградским шоссе, Юбилейным проспектом и улицей 9 Мая.</a:t>
+              <a:t>•  Рядом ещё Юбилейный проспект и улица 9 Мая.</a:t>
             </a:r>
           </a:p>
           <a:p>
             <a:pPr algn="l">
               <a:lnSpc>
-                <a:spcPct val="105000"/>
+                <a:spcPct val="102000"/>
               </a:lnSpc>
               <a:spcAft>
-                <a:spcPts val="800"/>
+                <a:spcPts val="600"/>
               </a:spcAft>
             </a:pPr>
             <a:r>
-              <a:rPr sz="2400" b="0">
+              <a:rPr sz="2200" b="0">
                 <a:solidFill>
                   <a:srgbClr val="1C2B24"/>
                 </a:solidFill>
@@ -3643,20 +4789,20 @@
                 <a:cs typeface="Arial"/>
                 <a:ea typeface="Arial"/>
               </a:rPr>
-              <a:t>•  Он больше десяти футбольных полей.</a:t>
+              <a:t>•  Площадь 7,67 гектара — больше десяти футбольных полей.</a:t>
             </a:r>
           </a:p>
           <a:p>
             <a:pPr algn="l">
               <a:lnSpc>
-                <a:spcPct val="105000"/>
+                <a:spcPct val="102000"/>
               </a:lnSpc>
               <a:spcAft>
-                <a:spcPts val="800"/>
+                <a:spcPts val="600"/>
               </a:spcAft>
             </a:pPr>
             <a:r>
-              <a:rPr sz="2400" b="0">
+              <a:rPr sz="2200" b="0">
                 <a:solidFill>
                   <a:srgbClr val="1C2B24"/>
                 </a:solidFill>
@@ -3664,32 +4810,35 @@
                 <a:cs typeface="Arial"/>
                 <a:ea typeface="Arial"/>
               </a:rPr>
-              <a:t>•  Гулять можно в любое время.</a:t>
-            </a:r>
-          </a:p>
-          <a:p>
-            <a:pPr algn="l">
-              <a:lnSpc>
-                <a:spcPct val="105000"/>
-              </a:lnSpc>
-              <a:spcAft>
-                <a:spcPts val="800"/>
-              </a:spcAft>
-            </a:pPr>
-            <a:r>
-              <a:rPr sz="2400" b="0">
-                <a:solidFill>
-                  <a:srgbClr val="1C2B24"/>
-                </a:solidFill>
-                <a:latin typeface="Arial"/>
-                <a:cs typeface="Arial"/>
-                <a:ea typeface="Arial"/>
-              </a:rPr>
-              <a:t>•  Площадку разбили в 1979 году прямо под электрическими проводами.</a:t>
-            </a:r>
-          </a:p>
-        </p:txBody>
-      </p:sp>
+              <a:t>•  Гулять можно круглые сутки.</a:t>
+            </a:r>
+          </a:p>
+        </p:txBody>
+      </p:sp>
+      <p:pic>
+        <p:nvPicPr>
+          <p:cNvPr id="9" name="Picture 8" descr="image.jpg"/>
+          <p:cNvPicPr>
+            <a:picLocks noChangeAspect="1"/>
+          </p:cNvPicPr>
+          <p:nvPr/>
+        </p:nvPicPr>
+        <p:blipFill>
+          <a:blip r:embed="rId3"/>
+          <a:stretch>
+            <a:fillRect/>
+          </a:stretch>
+        </p:blipFill>
+        <p:spPr>
+          <a:xfrm>
+            <a:off x="536448" y="1280160"/>
+            <a:ext cx="5547360" cy="4160520"/>
+          </a:xfrm>
+          <a:prstGeom prst="rect">
+            <a:avLst/>
+          </a:prstGeom>
+        </p:spPr>
+      </p:pic>
     </p:spTree>
   </p:cSld>
   <p:clrMapOvr>
@@ -3760,7 +4909,7 @@
         <p:spPr>
           <a:xfrm>
             <a:off x="0" y="0"/>
-            <a:ext cx="12191695" cy="1024128"/>
+            <a:ext cx="12191695" cy="960120"/>
           </a:xfrm>
           <a:prstGeom prst="rect">
             <a:avLst/>
@@ -3802,8 +4951,8 @@
         </p:nvSpPr>
         <p:spPr>
           <a:xfrm>
-            <a:off x="365760" y="201168"/>
-            <a:ext cx="11338560" cy="685800"/>
+            <a:off x="365760" y="164592"/>
+            <a:ext cx="11338560" cy="658368"/>
           </a:xfrm>
           <a:prstGeom prst="rect">
             <a:avLst/>
@@ -3811,7 +4960,7 @@
           <a:noFill/>
         </p:spPr>
         <p:txBody>
-          <a:bodyPr wrap="square" lIns="73152" rIns="73152" tIns="36576" bIns="36576" anchor="ctr"/>
+          <a:bodyPr wrap="square" lIns="54864" rIns="54864" tIns="18288" bIns="18288"/>
           <a:lstStyle/>
           <a:p>
             <a:pPr algn="l">
@@ -3819,11 +4968,11 @@
                 <a:spcPct val="100000"/>
               </a:lnSpc>
               <a:spcAft>
-                <a:spcPts val="800"/>
+                <a:spcPts val="600"/>
               </a:spcAft>
             </a:pPr>
             <a:r>
-              <a:rPr sz="3200" b="1">
+              <a:rPr sz="3000" b="1">
                 <a:solidFill>
                   <a:srgbClr val="FFFFFF"/>
                 </a:solidFill>
@@ -3831,7 +4980,7 @@
                 <a:cs typeface="Arial"/>
                 <a:ea typeface="Arial"/>
               </a:rPr>
-              <a:t>Мария Денисовна Рубцова</a:t>
+              <a:t>Провода и танк</a:t>
             </a:r>
           </a:p>
         </p:txBody>
@@ -3844,8 +4993,8 @@
         </p:nvSpPr>
         <p:spPr>
           <a:xfrm>
-            <a:off x="320040" y="1280160"/>
-            <a:ext cx="5989320" cy="4709160"/>
+            <a:off x="292608" y="1170432"/>
+            <a:ext cx="6035040" cy="4800600"/>
           </a:xfrm>
           <a:prstGeom prst="rect">
             <a:avLst/>
@@ -3881,7 +5030,7 @@
       </p:sp>
       <p:pic>
         <p:nvPicPr>
-          <p:cNvPr id="6" name="Picture 5" descr="rubcova.jpg"/>
+          <p:cNvPr id="6" name="Picture 5" descr="wide_print.jpg"/>
           <p:cNvPicPr>
             <a:picLocks noChangeAspect="1"/>
           </p:cNvPicPr>
@@ -3895,8 +5044,8 @@
         </p:blipFill>
         <p:spPr>
           <a:xfrm>
-            <a:off x="941832" y="1389888"/>
-            <a:ext cx="4754880" cy="4160520"/>
+            <a:off x="411480" y="1624452"/>
+            <a:ext cx="5797296" cy="3471936"/>
           </a:xfrm>
           <a:prstGeom prst="rect">
             <a:avLst/>
@@ -3911,8 +5060,8 @@
         </p:nvSpPr>
         <p:spPr>
           <a:xfrm>
-            <a:off x="365760" y="5623560"/>
-            <a:ext cx="5943600" cy="1051560"/>
+            <a:off x="347472" y="5596128"/>
+            <a:ext cx="5943600" cy="1097280"/>
           </a:xfrm>
           <a:prstGeom prst="rect">
             <a:avLst/>
@@ -3920,7 +5069,7 @@
           <a:noFill/>
         </p:spPr>
         <p:txBody>
-          <a:bodyPr wrap="square" lIns="73152" rIns="73152" tIns="36576" bIns="36576" anchor="t"/>
+          <a:bodyPr wrap="square" lIns="54864" rIns="54864" tIns="18288" bIns="18288"/>
           <a:lstStyle/>
           <a:p>
             <a:pPr algn="l">
@@ -3928,11 +5077,11 @@
                 <a:spcPct val="100000"/>
               </a:lnSpc>
               <a:spcAft>
-                <a:spcPts val="800"/>
+                <a:spcPts val="600"/>
               </a:spcAft>
             </a:pPr>
             <a:r>
-              <a:rPr sz="1100" b="0">
+              <a:rPr sz="1200" b="0">
                 <a:solidFill>
                   <a:srgbClr val="4E5E56"/>
                 </a:solidFill>
@@ -3940,7 +5089,7 @@
                 <a:cs typeface="Arial"/>
                 <a:ea typeface="Arial"/>
               </a:rPr>
-              <a:t>Портрет Марии Рубцовой. Источник: Химкинская библиотека, himki-library.ru.</a:t>
+              <a:t>Сквер и танк. Фото: Сергей Себелев, Wikimedia Commons, CC BY-SA 4.0.</a:t>
             </a:r>
           </a:p>
         </p:txBody>
@@ -3953,8 +5102,8 @@
         </p:nvSpPr>
         <p:spPr>
           <a:xfrm>
-            <a:off x="6492240" y="1417320"/>
-            <a:ext cx="5349240" cy="4937760"/>
+            <a:off x="6492240" y="1280160"/>
+            <a:ext cx="5394960" cy="5120640"/>
           </a:xfrm>
           <a:prstGeom prst="rect">
             <a:avLst/>
@@ -3962,19 +5111,19 @@
           <a:noFill/>
         </p:spPr>
         <p:txBody>
-          <a:bodyPr wrap="square" lIns="73152" rIns="73152" tIns="36576" bIns="36576" anchor="t"/>
+          <a:bodyPr wrap="square" lIns="54864" rIns="54864" tIns="18288" bIns="18288"/>
           <a:lstStyle/>
           <a:p>
             <a:pPr algn="l">
               <a:lnSpc>
-                <a:spcPct val="105000"/>
+                <a:spcPct val="102000"/>
               </a:lnSpc>
               <a:spcAft>
-                <a:spcPts val="800"/>
+                <a:spcPts val="600"/>
               </a:spcAft>
             </a:pPr>
             <a:r>
-              <a:rPr sz="2400" b="0">
+              <a:rPr sz="2200" b="0">
                 <a:solidFill>
                   <a:srgbClr val="1C2B24"/>
                 </a:solidFill>
@@ -3982,20 +5131,20 @@
                 <a:cs typeface="Arial"/>
                 <a:ea typeface="Arial"/>
               </a:rPr>
-              <a:t>•  Родилась 14 апреля 1914 года.</a:t>
+              <a:t>•  В 1979 году сквер разбили под линией электропередачи.</a:t>
             </a:r>
           </a:p>
           <a:p>
             <a:pPr algn="l">
               <a:lnSpc>
-                <a:spcPct val="105000"/>
+                <a:spcPct val="102000"/>
               </a:lnSpc>
               <a:spcAft>
-                <a:spcPts val="800"/>
+                <a:spcPts val="600"/>
               </a:spcAft>
             </a:pPr>
             <a:r>
-              <a:rPr sz="2400" b="0">
+              <a:rPr sz="2200" b="0">
                 <a:solidFill>
                   <a:srgbClr val="1C2B24"/>
                 </a:solidFill>
@@ -4003,20 +5152,20 @@
                 <a:cs typeface="Arial"/>
                 <a:ea typeface="Arial"/>
               </a:rPr>
-              <a:t>•  В 19 лет руководила стройкой дорог и аэродромов.</a:t>
+              <a:t>•  Обычно такую землю оставляют пустой.</a:t>
             </a:r>
           </a:p>
           <a:p>
             <a:pPr algn="l">
               <a:lnSpc>
-                <a:spcPct val="105000"/>
+                <a:spcPct val="102000"/>
               </a:lnSpc>
               <a:spcAft>
-                <a:spcPts val="800"/>
+                <a:spcPts val="600"/>
               </a:spcAft>
             </a:pPr>
             <a:r>
-              <a:rPr sz="2400" b="0">
+              <a:rPr sz="2200" b="0">
                 <a:solidFill>
                   <a:srgbClr val="1C2B24"/>
                 </a:solidFill>
@@ -4024,20 +5173,20 @@
                 <a:cs typeface="Arial"/>
                 <a:ea typeface="Arial"/>
               </a:rPr>
-              <a:t>•  Потом около 25 лет озеленяла Химки.</a:t>
+              <a:t>•  С 9 мая 2006 года здесь стоит танк Т-34-85.</a:t>
             </a:r>
           </a:p>
           <a:p>
             <a:pPr algn="l">
               <a:lnSpc>
-                <a:spcPct val="105000"/>
+                <a:spcPct val="102000"/>
               </a:lnSpc>
               <a:spcAft>
-                <a:spcPts val="800"/>
+                <a:spcPts val="600"/>
               </a:spcAft>
             </a:pPr>
             <a:r>
-              <a:rPr sz="2400" b="0">
+              <a:rPr sz="2200" b="0">
                 <a:solidFill>
                   <a:srgbClr val="1C2B24"/>
                 </a:solidFill>
@@ -4045,7 +5194,7 @@
                 <a:cs typeface="Arial"/>
                 <a:ea typeface="Arial"/>
               </a:rPr>
-              <a:t>•  При ней город не раз был первым в области по благоустройству.</a:t>
+              <a:t>•  Рядом пушки и боевые машины. К ним можно подойти.</a:t>
             </a:r>
           </a:p>
         </p:txBody>
@@ -4120,7 +5269,7 @@
         <p:spPr>
           <a:xfrm>
             <a:off x="0" y="0"/>
-            <a:ext cx="12191695" cy="1024128"/>
+            <a:ext cx="12191695" cy="960120"/>
           </a:xfrm>
           <a:prstGeom prst="rect">
             <a:avLst/>
@@ -4162,8 +5311,8 @@
         </p:nvSpPr>
         <p:spPr>
           <a:xfrm>
-            <a:off x="365760" y="201168"/>
-            <a:ext cx="11338560" cy="685800"/>
+            <a:off x="365760" y="164592"/>
+            <a:ext cx="11338560" cy="658368"/>
           </a:xfrm>
           <a:prstGeom prst="rect">
             <a:avLst/>
@@ -4171,7 +5320,7 @@
           <a:noFill/>
         </p:spPr>
         <p:txBody>
-          <a:bodyPr wrap="square" lIns="73152" rIns="73152" tIns="36576" bIns="36576" anchor="ctr"/>
+          <a:bodyPr wrap="square" lIns="54864" rIns="54864" tIns="18288" bIns="18288"/>
           <a:lstStyle/>
           <a:p>
             <a:pPr algn="l">
@@ -4179,11 +5328,11 @@
                 <a:spcPct val="100000"/>
               </a:lnSpc>
               <a:spcAft>
-                <a:spcPts val="800"/>
+                <a:spcPts val="600"/>
               </a:spcAft>
             </a:pPr>
             <a:r>
-              <a:rPr sz="3200" b="1">
+              <a:rPr sz="3000" b="1">
                 <a:solidFill>
                   <a:srgbClr val="FFFFFF"/>
                 </a:solidFill>
@@ -4191,7 +5340,7 @@
                 <a:cs typeface="Arial"/>
                 <a:ea typeface="Arial"/>
               </a:rPr>
-              <a:t>Что мало кто знает</a:t>
+              <a:t>Мария Денисовна Рубцова</a:t>
             </a:r>
           </a:p>
         </p:txBody>
@@ -4204,8 +5353,8 @@
         </p:nvSpPr>
         <p:spPr>
           <a:xfrm>
-            <a:off x="320040" y="1280160"/>
-            <a:ext cx="5989320" cy="4709160"/>
+            <a:off x="292608" y="1170432"/>
+            <a:ext cx="6035040" cy="4800600"/>
           </a:xfrm>
           <a:prstGeom prst="rect">
             <a:avLst/>
@@ -4241,7 +5390,7 @@
       </p:sp>
       <p:pic>
         <p:nvPicPr>
-          <p:cNvPr id="6" name="Picture 5" descr="wide_print.jpg"/>
+          <p:cNvPr id="6" name="Picture 5" descr="rubcova.jpg"/>
           <p:cNvPicPr>
             <a:picLocks noChangeAspect="1"/>
           </p:cNvPicPr>
@@ -4255,8 +5404,8 @@
         </p:blipFill>
         <p:spPr>
           <a:xfrm>
-            <a:off x="438912" y="1745132"/>
-            <a:ext cx="5760720" cy="3450031"/>
+            <a:off x="932688" y="1280160"/>
+            <a:ext cx="4754880" cy="4160520"/>
           </a:xfrm>
           <a:prstGeom prst="rect">
             <a:avLst/>
@@ -4271,8 +5420,8 @@
         </p:nvSpPr>
         <p:spPr>
           <a:xfrm>
-            <a:off x="365760" y="5623560"/>
-            <a:ext cx="5943600" cy="1051560"/>
+            <a:off x="347472" y="5596128"/>
+            <a:ext cx="5943600" cy="1097280"/>
           </a:xfrm>
           <a:prstGeom prst="rect">
             <a:avLst/>
@@ -4280,7 +5429,7 @@
           <a:noFill/>
         </p:spPr>
         <p:txBody>
-          <a:bodyPr wrap="square" lIns="73152" rIns="73152" tIns="36576" bIns="36576" anchor="t"/>
+          <a:bodyPr wrap="square" lIns="54864" rIns="54864" tIns="18288" bIns="18288"/>
           <a:lstStyle/>
           <a:p>
             <a:pPr algn="l">
@@ -4288,11 +5437,11 @@
                 <a:spcPct val="100000"/>
               </a:lnSpc>
               <a:spcAft>
-                <a:spcPts val="800"/>
+                <a:spcPts val="600"/>
               </a:spcAft>
             </a:pPr>
             <a:r>
-              <a:rPr sz="1100" b="0">
+              <a:rPr sz="1200" b="0">
                 <a:solidFill>
                   <a:srgbClr val="4E5E56"/>
                 </a:solidFill>
@@ -4300,7 +5449,7 @@
                 <a:cs typeface="Arial"/>
                 <a:ea typeface="Arial"/>
               </a:rPr>
-              <a:t>Сквер, который теперь носит её имя. Фото: Сергей Себелев, Wikimedia Commons, CC BY-SA 4.0.</a:t>
+              <a:t>Портрет Марии Рубцовой. Источник: Химкинская библиотека, himki-library.ru.</a:t>
             </a:r>
           </a:p>
         </p:txBody>
@@ -4313,8 +5462,8 @@
         </p:nvSpPr>
         <p:spPr>
           <a:xfrm>
-            <a:off x="6492240" y="1417320"/>
-            <a:ext cx="5349240" cy="4937760"/>
+            <a:off x="6492240" y="1280160"/>
+            <a:ext cx="5394960" cy="5120640"/>
           </a:xfrm>
           <a:prstGeom prst="rect">
             <a:avLst/>
@@ -4322,19 +5471,19 @@
           <a:noFill/>
         </p:spPr>
         <p:txBody>
-          <a:bodyPr wrap="square" lIns="73152" rIns="73152" tIns="36576" bIns="36576" anchor="t"/>
+          <a:bodyPr wrap="square" lIns="54864" rIns="54864" tIns="18288" bIns="18288"/>
           <a:lstStyle/>
           <a:p>
             <a:pPr algn="l">
               <a:lnSpc>
-                <a:spcPct val="105000"/>
+                <a:spcPct val="102000"/>
               </a:lnSpc>
               <a:spcAft>
-                <a:spcPts val="800"/>
+                <a:spcPts val="600"/>
               </a:spcAft>
             </a:pPr>
             <a:r>
-              <a:rPr sz="2400" b="0">
+              <a:rPr sz="2200" b="0">
                 <a:solidFill>
                   <a:srgbClr val="1C2B24"/>
                 </a:solidFill>
@@ -4342,20 +5491,20 @@
                 <a:cs typeface="Arial"/>
                 <a:ea typeface="Arial"/>
               </a:rPr>
-              <a:t>•  Сначала она была прорабом на стройке, а парки появились позже.</a:t>
+              <a:t>•  14 апреля 1914 — 22 июня 1993.</a:t>
             </a:r>
           </a:p>
           <a:p>
             <a:pPr algn="l">
               <a:lnSpc>
-                <a:spcPct val="105000"/>
+                <a:spcPct val="102000"/>
               </a:lnSpc>
               <a:spcAft>
-                <a:spcPts val="800"/>
+                <a:spcPts val="600"/>
               </a:spcAft>
             </a:pPr>
             <a:r>
-              <a:rPr sz="2400" b="0">
+              <a:rPr sz="2200" b="0">
                 <a:solidFill>
                   <a:srgbClr val="1C2B24"/>
                 </a:solidFill>
@@ -4363,20 +5512,20 @@
                 <a:cs typeface="Arial"/>
                 <a:ea typeface="Arial"/>
               </a:rPr>
-              <a:t>•  В 1980 году помогала готовить Химки к Олимпиаде.</a:t>
+              <a:t>•  В 19 лет строила дороги и аэродромы для обороны.</a:t>
             </a:r>
           </a:p>
           <a:p>
             <a:pPr algn="l">
               <a:lnSpc>
-                <a:spcPct val="105000"/>
+                <a:spcPct val="102000"/>
               </a:lnSpc>
               <a:spcAft>
-                <a:spcPts val="800"/>
+                <a:spcPts val="600"/>
               </a:spcAft>
             </a:pPr>
             <a:r>
-              <a:rPr sz="2400" b="0">
+              <a:rPr sz="2200" b="0">
                 <a:solidFill>
                   <a:srgbClr val="1C2B24"/>
                 </a:solidFill>
@@ -4384,20 +5533,20 @@
                 <a:cs typeface="Arial"/>
                 <a:ea typeface="Arial"/>
               </a:rPr>
-              <a:t>•  Почётным гражданином её назвали в 2002 году.</a:t>
+              <a:t>•  С 1956 года инженер, с 1969-го глава городской службы дворов и зелени.</a:t>
             </a:r>
           </a:p>
           <a:p>
             <a:pPr algn="l">
               <a:lnSpc>
-                <a:spcPct val="105000"/>
+                <a:spcPct val="102000"/>
               </a:lnSpc>
               <a:spcAft>
-                <a:spcPts val="800"/>
+                <a:spcPts val="600"/>
               </a:spcAft>
             </a:pPr>
             <a:r>
-              <a:rPr sz="2400" b="0">
+              <a:rPr sz="2200" b="0">
                 <a:solidFill>
                   <a:srgbClr val="1C2B24"/>
                 </a:solidFill>
@@ -4405,7 +5554,7 @@
                 <a:cs typeface="Arial"/>
                 <a:ea typeface="Arial"/>
               </a:rPr>
-              <a:t>•  Улица носит её имя с 1994 года, сквер открыли в 2004-м.</a:t>
+              <a:t>•  Жители выбирали её депутатом. Озеленяла Химки около 25 лет.</a:t>
             </a:r>
           </a:p>
         </p:txBody>
@@ -4480,7 +5629,7 @@
         <p:spPr>
           <a:xfrm>
             <a:off x="0" y="0"/>
-            <a:ext cx="12191695" cy="1024128"/>
+            <a:ext cx="12191695" cy="960120"/>
           </a:xfrm>
           <a:prstGeom prst="rect">
             <a:avLst/>
@@ -4522,8 +5671,8 @@
         </p:nvSpPr>
         <p:spPr>
           <a:xfrm>
-            <a:off x="365760" y="201168"/>
-            <a:ext cx="11338560" cy="685800"/>
+            <a:off x="365760" y="164592"/>
+            <a:ext cx="11338560" cy="658368"/>
           </a:xfrm>
           <a:prstGeom prst="rect">
             <a:avLst/>
@@ -4531,7 +5680,7 @@
           <a:noFill/>
         </p:spPr>
         <p:txBody>
-          <a:bodyPr wrap="square" lIns="73152" rIns="73152" tIns="36576" bIns="36576" anchor="ctr"/>
+          <a:bodyPr wrap="square" lIns="54864" rIns="54864" tIns="18288" bIns="18288"/>
           <a:lstStyle/>
           <a:p>
             <a:pPr algn="l">
@@ -4539,11 +5688,11 @@
                 <a:spcPct val="100000"/>
               </a:lnSpc>
               <a:spcAft>
-                <a:spcPts val="800"/>
+                <a:spcPts val="600"/>
               </a:spcAft>
             </a:pPr>
             <a:r>
-              <a:rPr sz="3200" b="1">
+              <a:rPr sz="3000" b="1">
                 <a:solidFill>
                   <a:srgbClr val="FFFFFF"/>
                 </a:solidFill>
@@ -4551,7 +5700,7 @@
                 <a:cs typeface="Arial"/>
                 <a:ea typeface="Arial"/>
               </a:rPr>
-              <a:t>Памятник медсестре</a:t>
+              <a:t>Что она создала в городе</a:t>
             </a:r>
           </a:p>
         </p:txBody>
@@ -4564,8 +5713,8 @@
         </p:nvSpPr>
         <p:spPr>
           <a:xfrm>
-            <a:off x="320040" y="1280160"/>
-            <a:ext cx="5989320" cy="4709160"/>
+            <a:off x="292608" y="1170432"/>
+            <a:ext cx="6035040" cy="4800600"/>
           </a:xfrm>
           <a:prstGeom prst="rect">
             <a:avLst/>
@@ -4601,7 +5750,7 @@
       </p:sp>
       <p:pic>
         <p:nvPicPr>
-          <p:cNvPr id="6" name="Picture 5" descr="nurse.jpg"/>
+          <p:cNvPr id="6" name="Picture 5" descr="102336.jpg"/>
           <p:cNvPicPr>
             <a:picLocks noChangeAspect="1"/>
           </p:cNvPicPr>
@@ -4615,7 +5764,7 @@
         </p:blipFill>
         <p:spPr>
           <a:xfrm>
-            <a:off x="545592" y="1389888"/>
+            <a:off x="536448" y="1280160"/>
             <a:ext cx="5547360" cy="4160520"/>
           </a:xfrm>
           <a:prstGeom prst="rect">
@@ -4631,8 +5780,8 @@
         </p:nvSpPr>
         <p:spPr>
           <a:xfrm>
-            <a:off x="365760" y="5623560"/>
-            <a:ext cx="5943600" cy="1051560"/>
+            <a:off x="347472" y="5596128"/>
+            <a:ext cx="5943600" cy="1097280"/>
           </a:xfrm>
           <a:prstGeom prst="rect">
             <a:avLst/>
@@ -4640,7 +5789,7 @@
           <a:noFill/>
         </p:spPr>
         <p:txBody>
-          <a:bodyPr wrap="square" lIns="73152" rIns="73152" tIns="36576" bIns="36576" anchor="t"/>
+          <a:bodyPr wrap="square" lIns="54864" rIns="54864" tIns="18288" bIns="18288"/>
           <a:lstStyle/>
           <a:p>
             <a:pPr algn="l">
@@ -4648,11 +5797,11 @@
                 <a:spcPct val="100000"/>
               </a:lnSpc>
               <a:spcAft>
-                <a:spcPts val="800"/>
+                <a:spcPts val="600"/>
               </a:spcAft>
             </a:pPr>
             <a:r>
-              <a:rPr sz="1100" b="0">
+              <a:rPr sz="1200" b="0">
                 <a:solidFill>
                   <a:srgbClr val="4E5E56"/>
                 </a:solidFill>
@@ -4660,7 +5809,7 @@
                 <a:cs typeface="Arial"/>
                 <a:ea typeface="Arial"/>
               </a:rPr>
-              <a:t>Фото памятника медсестре: stvo99, FotoTerra.ru, CC BY 3.0.</a:t>
+              <a:t>Памятник Ленину в Старых Химках. Вокруг него Рубцова устроила зелень. Фото: stvo99, FotoTerra.ru, CC BY 3.0.</a:t>
             </a:r>
           </a:p>
         </p:txBody>
@@ -4673,8 +5822,8 @@
         </p:nvSpPr>
         <p:spPr>
           <a:xfrm>
-            <a:off x="6492240" y="1417320"/>
-            <a:ext cx="5349240" cy="4937760"/>
+            <a:off x="6492240" y="1280160"/>
+            <a:ext cx="5394960" cy="5120640"/>
           </a:xfrm>
           <a:prstGeom prst="rect">
             <a:avLst/>
@@ -4682,19 +5831,19 @@
           <a:noFill/>
         </p:spPr>
         <p:txBody>
-          <a:bodyPr wrap="square" lIns="73152" rIns="73152" tIns="36576" bIns="36576" anchor="t"/>
+          <a:bodyPr wrap="square" lIns="54864" rIns="54864" tIns="18288" bIns="18288"/>
           <a:lstStyle/>
           <a:p>
             <a:pPr algn="l">
               <a:lnSpc>
-                <a:spcPct val="105000"/>
+                <a:spcPct val="102000"/>
               </a:lnSpc>
               <a:spcAft>
-                <a:spcPts val="800"/>
+                <a:spcPts val="600"/>
               </a:spcAft>
             </a:pPr>
             <a:r>
-              <a:rPr sz="2400" b="0">
+              <a:rPr sz="2200" b="0">
                 <a:solidFill>
                   <a:srgbClr val="1C2B24"/>
                 </a:solidFill>
@@ -4702,20 +5851,20 @@
                 <a:cs typeface="Arial"/>
                 <a:ea typeface="Arial"/>
               </a:rPr>
-              <a:t>•  Называется «Подвиг милосердия».</a:t>
+              <a:t>•  Парк «Дружба» и парк у кинотеатра «Юбилейный».</a:t>
             </a:r>
           </a:p>
           <a:p>
             <a:pPr algn="l">
               <a:lnSpc>
-                <a:spcPct val="105000"/>
+                <a:spcPct val="102000"/>
               </a:lnSpc>
               <a:spcAft>
-                <a:spcPts val="800"/>
+                <a:spcPts val="600"/>
               </a:spcAft>
             </a:pPr>
             <a:r>
-              <a:rPr sz="2400" b="0">
+              <a:rPr sz="2200" b="0">
                 <a:solidFill>
                   <a:srgbClr val="1C2B24"/>
                 </a:solidFill>
@@ -4723,20 +5872,20 @@
                 <a:cs typeface="Arial"/>
                 <a:ea typeface="Arial"/>
               </a:rPr>
-              <a:t>•  Открыт 8 мая 2005 года. Высота — 5,5 метра.</a:t>
+              <a:t>•  Зелёный массив вокруг памятника Ленину.</a:t>
             </a:r>
           </a:p>
           <a:p>
             <a:pPr algn="l">
               <a:lnSpc>
-                <a:spcPct val="105000"/>
+                <a:spcPct val="102000"/>
               </a:lnSpc>
               <a:spcAft>
-                <a:spcPts val="800"/>
+                <a:spcPts val="600"/>
               </a:spcAft>
             </a:pPr>
             <a:r>
-              <a:rPr sz="2400" b="0">
+              <a:rPr sz="2200" b="0">
                 <a:solidFill>
                   <a:srgbClr val="1C2B24"/>
                 </a:solidFill>
@@ -4744,20 +5893,20 @@
                 <a:cs typeface="Arial"/>
                 <a:ea typeface="Arial"/>
               </a:rPr>
-              <a:t>•  Медсестра держит раненого солдата.</a:t>
+              <a:t>•  Ели, берёзы, липовые аллеи и детские площадки.</a:t>
             </a:r>
           </a:p>
           <a:p>
             <a:pPr algn="l">
               <a:lnSpc>
-                <a:spcPct val="105000"/>
+                <a:spcPct val="102000"/>
               </a:lnSpc>
               <a:spcAft>
-                <a:spcPts val="800"/>
+                <a:spcPts val="600"/>
               </a:spcAft>
             </a:pPr>
             <a:r>
-              <a:rPr sz="2400" b="0">
+              <a:rPr sz="2200" b="0">
                 <a:solidFill>
                   <a:srgbClr val="1C2B24"/>
                 </a:solidFill>
@@ -4765,28 +5914,7 @@
                 <a:cs typeface="Arial"/>
                 <a:ea typeface="Arial"/>
               </a:rPr>
-              <a:t>•  Лицо списано с Марии Петровны Семиковой.</a:t>
-            </a:r>
-          </a:p>
-          <a:p>
-            <a:pPr algn="l">
-              <a:lnSpc>
-                <a:spcPct val="105000"/>
-              </a:lnSpc>
-              <a:spcAft>
-                <a:spcPts val="800"/>
-              </a:spcAft>
-            </a:pPr>
-            <a:r>
-              <a:rPr sz="2400" b="0">
-                <a:solidFill>
-                  <a:srgbClr val="1C2B24"/>
-                </a:solidFill>
-                <a:latin typeface="Arial"/>
-                <a:cs typeface="Arial"/>
-                <a:ea typeface="Arial"/>
-              </a:rPr>
-              <a:t>•  Она прошла всю войну и встретила Победу в Берлине.</a:t>
+              <a:t>•  Город не раз был первым в области по благоустройству.</a:t>
             </a:r>
           </a:p>
         </p:txBody>
@@ -4861,7 +5989,7 @@
         <p:spPr>
           <a:xfrm>
             <a:off x="0" y="0"/>
-            <a:ext cx="12191695" cy="1024128"/>
+            <a:ext cx="12191695" cy="960120"/>
           </a:xfrm>
           <a:prstGeom prst="rect">
             <a:avLst/>
@@ -4903,8 +6031,8 @@
         </p:nvSpPr>
         <p:spPr>
           <a:xfrm>
-            <a:off x="365760" y="201168"/>
-            <a:ext cx="11338560" cy="685800"/>
+            <a:off x="365760" y="164592"/>
+            <a:ext cx="11338560" cy="658368"/>
           </a:xfrm>
           <a:prstGeom prst="rect">
             <a:avLst/>
@@ -4912,7 +6040,7 @@
           <a:noFill/>
         </p:spPr>
         <p:txBody>
-          <a:bodyPr wrap="square" lIns="73152" rIns="73152" tIns="36576" bIns="36576" anchor="ctr"/>
+          <a:bodyPr wrap="square" lIns="54864" rIns="54864" tIns="18288" bIns="18288"/>
           <a:lstStyle/>
           <a:p>
             <a:pPr algn="l">
@@ -4920,11 +6048,11 @@
                 <a:spcPct val="100000"/>
               </a:lnSpc>
               <a:spcAft>
-                <a:spcPts val="800"/>
+                <a:spcPts val="600"/>
               </a:spcAft>
             </a:pPr>
             <a:r>
-              <a:rPr sz="3200" b="1">
+              <a:rPr sz="3000" b="1">
                 <a:solidFill>
                   <a:srgbClr val="FFFFFF"/>
                 </a:solidFill>
@@ -4932,7 +6060,7 @@
                 <a:cs typeface="Arial"/>
                 <a:ea typeface="Arial"/>
               </a:rPr>
-              <a:t>Танк и выставка техники</a:t>
+              <a:t>Награды и Олимпиада</a:t>
             </a:r>
           </a:p>
         </p:txBody>
@@ -4945,8 +6073,8 @@
         </p:nvSpPr>
         <p:spPr>
           <a:xfrm>
-            <a:off x="320040" y="1280160"/>
-            <a:ext cx="5989320" cy="4709160"/>
+            <a:off x="292608" y="1170432"/>
+            <a:ext cx="6035040" cy="4800600"/>
           </a:xfrm>
           <a:prstGeom prst="rect">
             <a:avLst/>
@@ -4982,7 +6110,7 @@
       </p:sp>
       <p:pic>
         <p:nvPicPr>
-          <p:cNvPr id="6" name="Picture 5" descr="tank_print.jpg"/>
+          <p:cNvPr id="6" name="Picture 5" descr="102313.jpg"/>
           <p:cNvPicPr>
             <a:picLocks noChangeAspect="1"/>
           </p:cNvPicPr>
@@ -4996,8 +6124,8 @@
         </p:blipFill>
         <p:spPr>
           <a:xfrm>
-            <a:off x="1203080" y="1389888"/>
-            <a:ext cx="4232383" cy="4160520"/>
+            <a:off x="536448" y="1280160"/>
+            <a:ext cx="5547360" cy="4160520"/>
           </a:xfrm>
           <a:prstGeom prst="rect">
             <a:avLst/>
@@ -5012,8 +6140,8 @@
         </p:nvSpPr>
         <p:spPr>
           <a:xfrm>
-            <a:off x="365760" y="5623560"/>
-            <a:ext cx="5943600" cy="1051560"/>
+            <a:off x="347472" y="5596128"/>
+            <a:ext cx="5943600" cy="1097280"/>
           </a:xfrm>
           <a:prstGeom prst="rect">
             <a:avLst/>
@@ -5021,7 +6149,7 @@
           <a:noFill/>
         </p:spPr>
         <p:txBody>
-          <a:bodyPr wrap="square" lIns="73152" rIns="73152" tIns="36576" bIns="36576" anchor="t"/>
+          <a:bodyPr wrap="square" lIns="54864" rIns="54864" tIns="18288" bIns="18288"/>
           <a:lstStyle/>
           <a:p>
             <a:pPr algn="l">
@@ -5029,11 +6157,11 @@
                 <a:spcPct val="100000"/>
               </a:lnSpc>
               <a:spcAft>
-                <a:spcPts val="800"/>
+                <a:spcPts val="600"/>
               </a:spcAft>
             </a:pPr>
             <a:r>
-              <a:rPr sz="1100" b="0">
+              <a:rPr sz="1200" b="0">
                 <a:solidFill>
                   <a:srgbClr val="4E5E56"/>
                 </a:solidFill>
@@ -5041,7 +6169,7 @@
                 <a:cs typeface="Arial"/>
                 <a:ea typeface="Arial"/>
               </a:rPr>
-              <a:t>Фрагмент фотографии Сергея Себелева, Wikimedia Commons, CC BY-SA 4.0.</a:t>
+              <a:t>Цветники на улице Маяковского в Химках. Фото: stvo99, FotoTerra.ru, CC BY 3.0.</a:t>
             </a:r>
           </a:p>
         </p:txBody>
@@ -5054,8 +6182,8 @@
         </p:nvSpPr>
         <p:spPr>
           <a:xfrm>
-            <a:off x="6492240" y="1417320"/>
-            <a:ext cx="5349240" cy="4937760"/>
+            <a:off x="6492240" y="1280160"/>
+            <a:ext cx="5394960" cy="5120640"/>
           </a:xfrm>
           <a:prstGeom prst="rect">
             <a:avLst/>
@@ -5063,19 +6191,19 @@
           <a:noFill/>
         </p:spPr>
         <p:txBody>
-          <a:bodyPr wrap="square" lIns="73152" rIns="73152" tIns="36576" bIns="36576" anchor="t"/>
+          <a:bodyPr wrap="square" lIns="54864" rIns="54864" tIns="18288" bIns="18288"/>
           <a:lstStyle/>
           <a:p>
             <a:pPr algn="l">
               <a:lnSpc>
-                <a:spcPct val="105000"/>
+                <a:spcPct val="102000"/>
               </a:lnSpc>
               <a:spcAft>
-                <a:spcPts val="800"/>
+                <a:spcPts val="600"/>
               </a:spcAft>
             </a:pPr>
             <a:r>
-              <a:rPr sz="2400" b="0">
+              <a:rPr sz="2200" b="0">
                 <a:solidFill>
                   <a:srgbClr val="1C2B24"/>
                 </a:solidFill>
@@ -5083,20 +6211,20 @@
                 <a:cs typeface="Arial"/>
                 <a:ea typeface="Arial"/>
               </a:rPr>
-              <a:t>•  Танк Т-34-85 стоит здесь с 9 мая 2006 года.</a:t>
+              <a:t>•  Орден Трудового Красного Знамени и три трудовые медали.</a:t>
             </a:r>
           </a:p>
           <a:p>
             <a:pPr algn="l">
               <a:lnSpc>
-                <a:spcPct val="105000"/>
+                <a:spcPct val="102000"/>
               </a:lnSpc>
               <a:spcAft>
-                <a:spcPts val="800"/>
+                <a:spcPts val="600"/>
               </a:spcAft>
             </a:pPr>
             <a:r>
-              <a:rPr sz="2400" b="0">
+              <a:rPr sz="2200" b="0">
                 <a:solidFill>
                   <a:srgbClr val="1C2B24"/>
                 </a:solidFill>
@@ -5104,20 +6232,20 @@
                 <a:cs typeface="Arial"/>
                 <a:ea typeface="Arial"/>
               </a:rPr>
-              <a:t>•  На аллее есть пушки и боевые машины.</a:t>
+              <a:t>•  В 1980 году помогала готовить Химки к Олимпиаде.</a:t>
             </a:r>
           </a:p>
           <a:p>
             <a:pPr algn="l">
               <a:lnSpc>
-                <a:spcPct val="105000"/>
+                <a:spcPct val="102000"/>
               </a:lnSpc>
               <a:spcAft>
-                <a:spcPts val="800"/>
+                <a:spcPts val="600"/>
               </a:spcAft>
             </a:pPr>
             <a:r>
-              <a:rPr sz="2400" b="0">
+              <a:rPr sz="2200" b="0">
                 <a:solidFill>
                   <a:srgbClr val="1C2B24"/>
                 </a:solidFill>
@@ -5125,20 +6253,20 @@
                 <a:cs typeface="Arial"/>
                 <a:ea typeface="Arial"/>
               </a:rPr>
-              <a:t>•  К технике можно подойти совсем близко.</a:t>
+              <a:t>•  В том же году стала заслуженным работником.</a:t>
             </a:r>
           </a:p>
           <a:p>
             <a:pPr algn="l">
               <a:lnSpc>
-                <a:spcPct val="105000"/>
+                <a:spcPct val="102000"/>
               </a:lnSpc>
               <a:spcAft>
-                <a:spcPts val="800"/>
+                <a:spcPts val="600"/>
               </a:spcAft>
             </a:pPr>
             <a:r>
-              <a:rPr sz="2400" b="0">
+              <a:rPr sz="2200" b="0">
                 <a:solidFill>
                   <a:srgbClr val="1C2B24"/>
                 </a:solidFill>
@@ -5146,7 +6274,7 @@
                 <a:cs typeface="Arial"/>
                 <a:ea typeface="Arial"/>
               </a:rPr>
-              <a:t>•  Это музей под открытым небом.</a:t>
+              <a:t>•  При ней на улицах появились цветники.</a:t>
             </a:r>
           </a:p>
         </p:txBody>
@@ -5221,7 +6349,7 @@
         <p:spPr>
           <a:xfrm>
             <a:off x="0" y="0"/>
-            <a:ext cx="12191695" cy="1024128"/>
+            <a:ext cx="12191695" cy="960120"/>
           </a:xfrm>
           <a:prstGeom prst="rect">
             <a:avLst/>
@@ -5263,8 +6391,8 @@
         </p:nvSpPr>
         <p:spPr>
           <a:xfrm>
-            <a:off x="365760" y="201168"/>
-            <a:ext cx="11338560" cy="685800"/>
+            <a:off x="365760" y="164592"/>
+            <a:ext cx="11338560" cy="658368"/>
           </a:xfrm>
           <a:prstGeom prst="rect">
             <a:avLst/>
@@ -5272,7 +6400,7 @@
           <a:noFill/>
         </p:spPr>
         <p:txBody>
-          <a:bodyPr wrap="square" lIns="73152" rIns="73152" tIns="36576" bIns="36576" anchor="ctr"/>
+          <a:bodyPr wrap="square" lIns="54864" rIns="54864" tIns="18288" bIns="18288"/>
           <a:lstStyle/>
           <a:p>
             <a:pPr algn="l">
@@ -5280,11 +6408,11 @@
                 <a:spcPct val="100000"/>
               </a:lnSpc>
               <a:spcAft>
-                <a:spcPts val="800"/>
+                <a:spcPts val="600"/>
               </a:spcAft>
             </a:pPr>
             <a:r>
-              <a:rPr sz="3200" b="1">
+              <a:rPr sz="3000" b="1">
                 <a:solidFill>
                   <a:srgbClr val="FFFFFF"/>
                 </a:solidFill>
@@ -5292,7 +6420,7 @@
                 <a:cs typeface="Arial"/>
                 <a:ea typeface="Arial"/>
               </a:rPr>
-              <a:t>Детская площадка</a:t>
+              <a:t>Что мало кто знает</a:t>
             </a:r>
           </a:p>
         </p:txBody>
@@ -5305,8 +6433,8 @@
         </p:nvSpPr>
         <p:spPr>
           <a:xfrm>
-            <a:off x="320040" y="1280160"/>
-            <a:ext cx="5989320" cy="4709160"/>
+            <a:off x="292608" y="1170432"/>
+            <a:ext cx="6035040" cy="4800600"/>
           </a:xfrm>
           <a:prstGeom prst="rect">
             <a:avLst/>
@@ -5342,7 +6470,7 @@
       </p:sp>
       <p:pic>
         <p:nvPicPr>
-          <p:cNvPr id="6" name="Picture 5" descr="play.jpg"/>
+          <p:cNvPr id="6" name="Picture 5" descr="102509.jpg"/>
           <p:cNvPicPr>
             <a:picLocks noChangeAspect="1"/>
           </p:cNvPicPr>
@@ -5356,7 +6484,7 @@
         </p:blipFill>
         <p:spPr>
           <a:xfrm>
-            <a:off x="545592" y="1389888"/>
+            <a:off x="536448" y="1280160"/>
             <a:ext cx="5547360" cy="4160520"/>
           </a:xfrm>
           <a:prstGeom prst="rect">
@@ -5372,8 +6500,8 @@
         </p:nvSpPr>
         <p:spPr>
           <a:xfrm>
-            <a:off x="365760" y="5623560"/>
-            <a:ext cx="5943600" cy="1051560"/>
+            <a:off x="347472" y="5596128"/>
+            <a:ext cx="5943600" cy="1097280"/>
           </a:xfrm>
           <a:prstGeom prst="rect">
             <a:avLst/>
@@ -5381,7 +6509,7 @@
           <a:noFill/>
         </p:spPr>
         <p:txBody>
-          <a:bodyPr wrap="square" lIns="73152" rIns="73152" tIns="36576" bIns="36576" anchor="t"/>
+          <a:bodyPr wrap="square" lIns="54864" rIns="54864" tIns="18288" bIns="18288"/>
           <a:lstStyle/>
           <a:p>
             <a:pPr algn="l">
@@ -5389,11 +6517,11 @@
                 <a:spcPct val="100000"/>
               </a:lnSpc>
               <a:spcAft>
-                <a:spcPts val="800"/>
+                <a:spcPts val="600"/>
               </a:spcAft>
             </a:pPr>
             <a:r>
-              <a:rPr sz="1100" b="0">
+              <a:rPr sz="1200" b="0">
                 <a:solidFill>
                   <a:srgbClr val="4E5E56"/>
                 </a:solidFill>
@@ -5401,7 +6529,7 @@
                 <a:cs typeface="Arial"/>
                 <a:ea typeface="Arial"/>
               </a:rPr>
-              <a:t>Детская площадка у сквера. Фото: stvo99, FotoTerra.ru, CC BY 3.0.</a:t>
+              <a:t>Дома в микрорайоне улицы Марии Рубцовой. Фото: stvo99, FotoTerra.ru, CC BY 3.0.</a:t>
             </a:r>
           </a:p>
         </p:txBody>
@@ -5414,8 +6542,8 @@
         </p:nvSpPr>
         <p:spPr>
           <a:xfrm>
-            <a:off x="6492240" y="1417320"/>
-            <a:ext cx="5349240" cy="4937760"/>
+            <a:off x="6492240" y="1280160"/>
+            <a:ext cx="5394960" cy="5120640"/>
           </a:xfrm>
           <a:prstGeom prst="rect">
             <a:avLst/>
@@ -5423,19 +6551,19 @@
           <a:noFill/>
         </p:spPr>
         <p:txBody>
-          <a:bodyPr wrap="square" lIns="73152" rIns="73152" tIns="36576" bIns="36576" anchor="t"/>
+          <a:bodyPr wrap="square" lIns="54864" rIns="54864" tIns="18288" bIns="18288"/>
           <a:lstStyle/>
           <a:p>
             <a:pPr algn="l">
               <a:lnSpc>
-                <a:spcPct val="105000"/>
+                <a:spcPct val="102000"/>
               </a:lnSpc>
               <a:spcAft>
-                <a:spcPts val="800"/>
+                <a:spcPts val="600"/>
               </a:spcAft>
             </a:pPr>
             <a:r>
-              <a:rPr sz="2400" b="0">
+              <a:rPr sz="2200" b="0">
                 <a:solidFill>
                   <a:srgbClr val="1C2B24"/>
                 </a:solidFill>
@@ -5443,20 +6571,20 @@
                 <a:cs typeface="Arial"/>
                 <a:ea typeface="Arial"/>
               </a:rPr>
-              <a:t>•  Большие буквы складываются в слово «Химки».</a:t>
+              <a:t>•  Почётным гражданином её назвали 5 апреля 2002 года, через девять лет после неё.</a:t>
             </a:r>
           </a:p>
           <a:p>
             <a:pPr algn="l">
               <a:lnSpc>
-                <a:spcPct val="105000"/>
+                <a:spcPct val="102000"/>
               </a:lnSpc>
               <a:spcAft>
-                <a:spcPts val="800"/>
+                <a:spcPts val="600"/>
               </a:spcAft>
             </a:pPr>
             <a:r>
-              <a:rPr sz="2400" b="0">
+              <a:rPr sz="2200" b="0">
                 <a:solidFill>
                   <a:srgbClr val="1C2B24"/>
                 </a:solidFill>
@@ -5464,20 +6592,20 @@
                 <a:cs typeface="Arial"/>
                 <a:ea typeface="Arial"/>
               </a:rPr>
-              <a:t>•  Рядом горки и дорожки для игр.</a:t>
+              <a:t>•  Улица носит её имя с 1994 года, сквер открыли в 2004-м.</a:t>
             </a:r>
           </a:p>
           <a:p>
             <a:pPr algn="l">
               <a:lnSpc>
-                <a:spcPct val="105000"/>
+                <a:spcPct val="102000"/>
               </a:lnSpc>
               <a:spcAft>
-                <a:spcPts val="800"/>
+                <a:spcPts val="600"/>
               </a:spcAft>
             </a:pPr>
             <a:r>
-              <a:rPr sz="2400" b="0">
+              <a:rPr sz="2200" b="0">
                 <a:solidFill>
                   <a:srgbClr val="1C2B24"/>
                 </a:solidFill>
@@ -5485,20 +6613,20 @@
                 <a:cs typeface="Arial"/>
                 <a:ea typeface="Arial"/>
               </a:rPr>
-              <a:t>•  Есть фонтан, футбольная площадка и место для собак.</a:t>
+              <a:t>•  Табличку со своим именем она не увидела.</a:t>
             </a:r>
           </a:p>
           <a:p>
             <a:pPr algn="l">
               <a:lnSpc>
-                <a:spcPct val="105000"/>
+                <a:spcPct val="102000"/>
               </a:lnSpc>
               <a:spcAft>
-                <a:spcPts val="800"/>
+                <a:spcPts val="600"/>
               </a:spcAft>
             </a:pPr>
             <a:r>
-              <a:rPr sz="2400" b="0">
+              <a:rPr sz="2200" b="0">
                 <a:solidFill>
                   <a:srgbClr val="1C2B24"/>
                 </a:solidFill>
@@ -5506,7 +6634,7 @@
                 <a:cs typeface="Arial"/>
                 <a:ea typeface="Arial"/>
               </a:rPr>
-              <a:t>•  В 2024 году открыли скейт-парк и дорожку для самокатов.</a:t>
+              <a:t>•  Сквер начали делать ещё в 1970-е, при её жизни.</a:t>
             </a:r>
           </a:p>
         </p:txBody>
@@ -5581,7 +6709,7 @@
         <p:spPr>
           <a:xfrm>
             <a:off x="0" y="0"/>
-            <a:ext cx="12191695" cy="1024128"/>
+            <a:ext cx="12191695" cy="960120"/>
           </a:xfrm>
           <a:prstGeom prst="rect">
             <a:avLst/>
@@ -5623,8 +6751,8 @@
         </p:nvSpPr>
         <p:spPr>
           <a:xfrm>
-            <a:off x="365760" y="201168"/>
-            <a:ext cx="11338560" cy="685800"/>
+            <a:off x="365760" y="164592"/>
+            <a:ext cx="11338560" cy="658368"/>
           </a:xfrm>
           <a:prstGeom prst="rect">
             <a:avLst/>
@@ -5632,7 +6760,7 @@
           <a:noFill/>
         </p:spPr>
         <p:txBody>
-          <a:bodyPr wrap="square" lIns="73152" rIns="73152" tIns="36576" bIns="36576" anchor="ctr"/>
+          <a:bodyPr wrap="square" lIns="54864" rIns="54864" tIns="18288" bIns="18288"/>
           <a:lstStyle/>
           <a:p>
             <a:pPr algn="l">
@@ -5640,11 +6768,11 @@
                 <a:spcPct val="100000"/>
               </a:lnSpc>
               <a:spcAft>
-                <a:spcPts val="800"/>
+                <a:spcPts val="600"/>
               </a:spcAft>
             </a:pPr>
             <a:r>
-              <a:rPr sz="3200" b="1">
+              <a:rPr sz="3000" b="1">
                 <a:solidFill>
                   <a:srgbClr val="FFFFFF"/>
                 </a:solidFill>
@@ -5652,7 +6780,7 @@
                 <a:cs typeface="Arial"/>
                 <a:ea typeface="Arial"/>
               </a:rPr>
-              <a:t>Почему я выбрала этот сквер</a:t>
+              <a:t>Памятник медсестре</a:t>
             </a:r>
           </a:p>
         </p:txBody>
@@ -5665,8 +6793,8 @@
         </p:nvSpPr>
         <p:spPr>
           <a:xfrm>
-            <a:off x="320040" y="1280160"/>
-            <a:ext cx="5989320" cy="4709160"/>
+            <a:off x="292608" y="1170432"/>
+            <a:ext cx="6035040" cy="4800600"/>
           </a:xfrm>
           <a:prstGeom prst="rect">
             <a:avLst/>
@@ -5702,7 +6830,7 @@
       </p:sp>
       <p:pic>
         <p:nvPicPr>
-          <p:cNvPr id="6" name="Picture 5" descr="wide_print.jpg"/>
+          <p:cNvPr id="6" name="Picture 5" descr="102473.jpg"/>
           <p:cNvPicPr>
             <a:picLocks noChangeAspect="1"/>
           </p:cNvPicPr>
@@ -5716,8 +6844,8 @@
         </p:blipFill>
         <p:spPr>
           <a:xfrm>
-            <a:off x="438912" y="1745132"/>
-            <a:ext cx="5760720" cy="3450031"/>
+            <a:off x="536448" y="1280160"/>
+            <a:ext cx="5547360" cy="4160520"/>
           </a:xfrm>
           <a:prstGeom prst="rect">
             <a:avLst/>
@@ -5732,8 +6860,8 @@
         </p:nvSpPr>
         <p:spPr>
           <a:xfrm>
-            <a:off x="365760" y="5623560"/>
-            <a:ext cx="5943600" cy="1051560"/>
+            <a:off x="347472" y="5596128"/>
+            <a:ext cx="5943600" cy="1097280"/>
           </a:xfrm>
           <a:prstGeom prst="rect">
             <a:avLst/>
@@ -5741,7 +6869,7 @@
           <a:noFill/>
         </p:spPr>
         <p:txBody>
-          <a:bodyPr wrap="square" lIns="73152" rIns="73152" tIns="36576" bIns="36576" anchor="t"/>
+          <a:bodyPr wrap="square" lIns="54864" rIns="54864" tIns="18288" bIns="18288"/>
           <a:lstStyle/>
           <a:p>
             <a:pPr algn="l">
@@ -5749,11 +6877,11 @@
                 <a:spcPct val="100000"/>
               </a:lnSpc>
               <a:spcAft>
-                <a:spcPts val="800"/>
+                <a:spcPts val="600"/>
               </a:spcAft>
             </a:pPr>
             <a:r>
-              <a:rPr sz="1100" b="0">
+              <a:rPr sz="1200" b="0">
                 <a:solidFill>
                   <a:srgbClr val="4E5E56"/>
                 </a:solidFill>
@@ -5761,7 +6889,7 @@
                 <a:cs typeface="Arial"/>
                 <a:ea typeface="Arial"/>
               </a:rPr>
-              <a:t>Фото: Сергей Себелев, Wikimedia Commons, CC BY-SA 4.0.</a:t>
+              <a:t>Памятник в сквере. Фото: stvo99, FotoTerra.ru, CC BY 3.0.</a:t>
             </a:r>
           </a:p>
         </p:txBody>
@@ -5774,8 +6902,8 @@
         </p:nvSpPr>
         <p:spPr>
           <a:xfrm>
-            <a:off x="6492240" y="1417320"/>
-            <a:ext cx="5349240" cy="4206240"/>
+            <a:off x="6492240" y="1280160"/>
+            <a:ext cx="5394960" cy="5120640"/>
           </a:xfrm>
           <a:prstGeom prst="rect">
             <a:avLst/>
@@ -5783,19 +6911,19 @@
           <a:noFill/>
         </p:spPr>
         <p:txBody>
-          <a:bodyPr wrap="square" lIns="73152" rIns="73152" tIns="36576" bIns="36576" anchor="t"/>
+          <a:bodyPr wrap="square" lIns="54864" rIns="54864" tIns="18288" bIns="18288"/>
           <a:lstStyle/>
           <a:p>
             <a:pPr algn="l">
               <a:lnSpc>
-                <a:spcPct val="108000"/>
+                <a:spcPct val="102000"/>
               </a:lnSpc>
               <a:spcAft>
-                <a:spcPts val="800"/>
+                <a:spcPts val="600"/>
               </a:spcAft>
             </a:pPr>
             <a:r>
-              <a:rPr sz="2400" b="0">
+              <a:rPr sz="2000" b="0">
                 <a:solidFill>
                   <a:srgbClr val="1C2B24"/>
                 </a:solidFill>
@@ -5803,20 +6931,20 @@
                 <a:cs typeface="Arial"/>
                 <a:ea typeface="Arial"/>
               </a:rPr>
-              <a:t>Здесь рядом растут деревья, стоит танк и памятник медсестре.</a:t>
+              <a:t>•  «Подвиг. Милосердие. 1941–1945». Открыт 8 мая 2005 года.</a:t>
             </a:r>
           </a:p>
           <a:p>
             <a:pPr algn="l">
               <a:lnSpc>
-                <a:spcPct val="108000"/>
+                <a:spcPct val="102000"/>
               </a:lnSpc>
               <a:spcAft>
-                <a:spcPts val="800"/>
+                <a:spcPts val="600"/>
               </a:spcAft>
             </a:pPr>
             <a:r>
-              <a:rPr sz="2400" b="0">
+              <a:rPr sz="2000" b="0">
                 <a:solidFill>
                   <a:srgbClr val="1C2B24"/>
                 </a:solidFill>
@@ -5824,42 +6952,167 @@
                 <a:cs typeface="Arial"/>
                 <a:ea typeface="Arial"/>
               </a:rPr>
-              <a:t>За одну прогулку можно увидеть парк и музей.</a:t>
+              <a:t>•  Это было к 60-летию Победы. Высота — 5,5 метра.</a:t>
             </a:r>
           </a:p>
           <a:p>
             <a:pPr algn="l">
               <a:lnSpc>
-                <a:spcPct val="108000"/>
+                <a:spcPct val="102000"/>
               </a:lnSpc>
               <a:spcAft>
-                <a:spcPts val="800"/>
+                <a:spcPts val="600"/>
               </a:spcAft>
             </a:pPr>
             <a:r>
-              <a:rPr sz="2600" b="1">
-                <a:solidFill>
-                  <a:srgbClr val="1B5E45"/>
+              <a:rPr sz="2000" b="0">
+                <a:solidFill>
+                  <a:srgbClr val="1C2B24"/>
                 </a:solidFill>
                 <a:latin typeface="Arial"/>
                 <a:cs typeface="Arial"/>
                 <a:ea typeface="Arial"/>
               </a:rPr>
-              <a:t>Титова Ева, 3 класс</a:t>
-            </a:r>
-          </a:p>
-        </p:txBody>
-      </p:sp>
-      <p:sp>
-        <p:nvSpPr>
-          <p:cNvPr id="9" name="TextBox 8"/>
+              <a:t>•  Бронза и красный гранит. Скульптор Валерий Евдокимов.</a:t>
+            </a:r>
+          </a:p>
+          <a:p>
+            <a:pPr algn="l">
+              <a:lnSpc>
+                <a:spcPct val="102000"/>
+              </a:lnSpc>
+              <a:spcAft>
+                <a:spcPts val="600"/>
+              </a:spcAft>
+            </a:pPr>
+            <a:r>
+              <a:rPr sz="2000" b="0">
+                <a:solidFill>
+                  <a:srgbClr val="1C2B24"/>
+                </a:solidFill>
+                <a:latin typeface="Arial"/>
+                <a:cs typeface="Arial"/>
+                <a:ea typeface="Arial"/>
+              </a:rPr>
+              <a:t>•  Журналисты писали: отдельного памятника фронтовой медсестре в России ещё не было.</a:t>
+            </a:r>
+          </a:p>
+        </p:txBody>
+      </p:sp>
+    </p:spTree>
+  </p:cSld>
+  <p:clrMapOvr>
+    <a:masterClrMapping/>
+  </p:clrMapOvr>
+</p:sld>
+</file>
+
+<file path=ppt/slides/slide9.xml><?xml version="1.0" encoding="utf-8"?>
+<p:sld xmlns:a="http://schemas.openxmlformats.org/drawingml/2006/main" xmlns:p="http://schemas.openxmlformats.org/presentationml/2006/main" xmlns:r="http://schemas.openxmlformats.org/officeDocument/2006/relationships">
+  <p:cSld>
+    <p:spTree>
+      <p:nvGrpSpPr>
+        <p:cNvPr id="1" name=""/>
+        <p:cNvGrpSpPr/>
+        <p:nvPr/>
+      </p:nvGrpSpPr>
+      <p:grpSpPr/>
+      <p:sp>
+        <p:nvSpPr>
+          <p:cNvPr id="2" name="Rectangle 1"/>
+          <p:cNvSpPr/>
+          <p:nvPr/>
+        </p:nvSpPr>
+        <p:spPr>
+          <a:xfrm>
+            <a:off x="0" y="0"/>
+            <a:ext cx="12191695" cy="6858000"/>
+          </a:xfrm>
+          <a:prstGeom prst="rect">
+            <a:avLst/>
+          </a:prstGeom>
+          <a:solidFill>
+            <a:srgbClr val="F6F3EA"/>
+          </a:solidFill>
+          <a:ln>
+            <a:noFill/>
+          </a:ln>
+        </p:spPr>
+        <p:style>
+          <a:lnRef idx="1">
+            <a:schemeClr val="accent1"/>
+          </a:lnRef>
+          <a:fillRef idx="3">
+            <a:schemeClr val="accent1"/>
+          </a:fillRef>
+          <a:effectRef idx="2">
+            <a:schemeClr val="accent1"/>
+          </a:effectRef>
+          <a:fontRef idx="minor">
+            <a:schemeClr val="lt1"/>
+          </a:fontRef>
+        </p:style>
+        <p:txBody>
+          <a:bodyPr rtlCol="0" anchor="ctr"/>
+          <a:lstStyle/>
+          <a:p>
+            <a:pPr algn="ctr"/>
+          </a:p>
+        </p:txBody>
+      </p:sp>
+      <p:sp>
+        <p:nvSpPr>
+          <p:cNvPr id="3" name="Rectangle 2"/>
+          <p:cNvSpPr/>
+          <p:nvPr/>
+        </p:nvSpPr>
+        <p:spPr>
+          <a:xfrm>
+            <a:off x="0" y="0"/>
+            <a:ext cx="12191695" cy="960120"/>
+          </a:xfrm>
+          <a:prstGeom prst="rect">
+            <a:avLst/>
+          </a:prstGeom>
+          <a:solidFill>
+            <a:srgbClr val="1B5E45"/>
+          </a:solidFill>
+          <a:ln>
+            <a:noFill/>
+          </a:ln>
+        </p:spPr>
+        <p:style>
+          <a:lnRef idx="1">
+            <a:schemeClr val="accent1"/>
+          </a:lnRef>
+          <a:fillRef idx="3">
+            <a:schemeClr val="accent1"/>
+          </a:fillRef>
+          <a:effectRef idx="2">
+            <a:schemeClr val="accent1"/>
+          </a:effectRef>
+          <a:fontRef idx="minor">
+            <a:schemeClr val="lt1"/>
+          </a:fontRef>
+        </p:style>
+        <p:txBody>
+          <a:bodyPr rtlCol="0" anchor="ctr"/>
+          <a:lstStyle/>
+          <a:p>
+            <a:pPr algn="ctr"/>
+          </a:p>
+        </p:txBody>
+      </p:sp>
+      <p:sp>
+        <p:nvSpPr>
+          <p:cNvPr id="4" name="TextBox 3"/>
           <p:cNvSpPr txBox="1"/>
           <p:nvPr/>
         </p:nvSpPr>
         <p:spPr>
           <a:xfrm>
-            <a:off x="6492240" y="5623560"/>
-            <a:ext cx="5349240" cy="1005840"/>
+            <a:off x="365760" y="164592"/>
+            <a:ext cx="11338560" cy="658368"/>
           </a:xfrm>
           <a:prstGeom prst="rect">
             <a:avLst/>
@@ -5867,7 +7120,7 @@
           <a:noFill/>
         </p:spPr>
         <p:txBody>
-          <a:bodyPr wrap="square" lIns="73152" rIns="73152" tIns="36576" bIns="36576" anchor="t"/>
+          <a:bodyPr wrap="square" lIns="54864" rIns="54864" tIns="18288" bIns="18288"/>
           <a:lstStyle/>
           <a:p>
             <a:pPr algn="l">
@@ -5875,19 +7128,233 @@
                 <a:spcPct val="100000"/>
               </a:lnSpc>
               <a:spcAft>
-                <a:spcPts val="800"/>
+                <a:spcPts val="600"/>
               </a:spcAft>
             </a:pPr>
             <a:r>
-              <a:rPr sz="1200" b="0">
-                <a:solidFill>
-                  <a:srgbClr val="4E5E56"/>
+              <a:rPr sz="3000" b="1">
+                <a:solidFill>
+                  <a:srgbClr val="FFFFFF"/>
                 </a:solidFill>
                 <a:latin typeface="Arial"/>
                 <a:cs typeface="Arial"/>
                 <a:ea typeface="Arial"/>
               </a:rPr>
-              <a:t>Сведения: Химкинская библиотека, Википедия, сайт администрации Химок, «Парки Химок».</a:t>
+              <a:t>Мария Петровна Семикова</a:t>
+            </a:r>
+          </a:p>
+        </p:txBody>
+      </p:sp>
+      <p:sp>
+        <p:nvSpPr>
+          <p:cNvPr id="5" name="Rectangle 4"/>
+          <p:cNvSpPr/>
+          <p:nvPr/>
+        </p:nvSpPr>
+        <p:spPr>
+          <a:xfrm>
+            <a:off x="292608" y="1170432"/>
+            <a:ext cx="6035040" cy="4800600"/>
+          </a:xfrm>
+          <a:prstGeom prst="rect">
+            <a:avLst/>
+          </a:prstGeom>
+          <a:solidFill>
+            <a:srgbClr val="FFFFFF"/>
+          </a:solidFill>
+          <a:ln>
+            <a:noFill/>
+          </a:ln>
+        </p:spPr>
+        <p:style>
+          <a:lnRef idx="1">
+            <a:schemeClr val="accent1"/>
+          </a:lnRef>
+          <a:fillRef idx="3">
+            <a:schemeClr val="accent1"/>
+          </a:fillRef>
+          <a:effectRef idx="2">
+            <a:schemeClr val="accent1"/>
+          </a:effectRef>
+          <a:fontRef idx="minor">
+            <a:schemeClr val="lt1"/>
+          </a:fontRef>
+        </p:style>
+        <p:txBody>
+          <a:bodyPr rtlCol="0" anchor="ctr"/>
+          <a:lstStyle/>
+          <a:p>
+            <a:pPr algn="ctr"/>
+          </a:p>
+        </p:txBody>
+      </p:sp>
+      <p:pic>
+        <p:nvPicPr>
+          <p:cNvPr id="6" name="Picture 5" descr="semi_w390.png"/>
+          <p:cNvPicPr>
+            <a:picLocks noChangeAspect="1"/>
+          </p:cNvPicPr>
+          <p:nvPr/>
+        </p:nvPicPr>
+        <p:blipFill>
+          <a:blip r:embed="rId2"/>
+          <a:stretch>
+            <a:fillRect/>
+          </a:stretch>
+        </p:blipFill>
+        <p:spPr>
+          <a:xfrm>
+            <a:off x="1923288" y="1280160"/>
+            <a:ext cx="2773680" cy="4160520"/>
+          </a:xfrm>
+          <a:prstGeom prst="rect">
+            <a:avLst/>
+          </a:prstGeom>
+        </p:spPr>
+      </p:pic>
+      <p:sp>
+        <p:nvSpPr>
+          <p:cNvPr id="7" name="TextBox 6"/>
+          <p:cNvSpPr txBox="1"/>
+          <p:nvPr/>
+        </p:nvSpPr>
+        <p:spPr>
+          <a:xfrm>
+            <a:off x="347472" y="5596128"/>
+            <a:ext cx="5943600" cy="1097280"/>
+          </a:xfrm>
+          <a:prstGeom prst="rect">
+            <a:avLst/>
+          </a:prstGeom>
+          <a:noFill/>
+        </p:spPr>
+        <p:txBody>
+          <a:bodyPr wrap="square" lIns="54864" rIns="54864" tIns="18288" bIns="18288"/>
+          <a:lstStyle/>
+          <a:p>
+            <a:pPr algn="l">
+              <a:lnSpc>
+                <a:spcPct val="100000"/>
+              </a:lnSpc>
+              <a:spcAft>
+                <a:spcPts val="600"/>
+              </a:spcAft>
+            </a:pPr>
+            <a:r>
+              <a:rPr sz="1200" b="0">
+                <a:solidFill>
+                  <a:srgbClr val="4E5E56"/>
+                </a:solidFill>
+                <a:latin typeface="Arial"/>
+                <a:cs typeface="Arial"/>
+                <a:ea typeface="Arial"/>
+              </a:rPr>
+              <a:t>Крупный план памятника медсестре. Фото: сайт «Бессмертный полк», moypolk.ru.</a:t>
+            </a:r>
+          </a:p>
+        </p:txBody>
+      </p:sp>
+      <p:sp>
+        <p:nvSpPr>
+          <p:cNvPr id="8" name="TextBox 7"/>
+          <p:cNvSpPr txBox="1"/>
+          <p:nvPr/>
+        </p:nvSpPr>
+        <p:spPr>
+          <a:xfrm>
+            <a:off x="6492240" y="1280160"/>
+            <a:ext cx="5394960" cy="5120640"/>
+          </a:xfrm>
+          <a:prstGeom prst="rect">
+            <a:avLst/>
+          </a:prstGeom>
+          <a:noFill/>
+        </p:spPr>
+        <p:txBody>
+          <a:bodyPr wrap="square" lIns="54864" rIns="54864" tIns="18288" bIns="18288"/>
+          <a:lstStyle/>
+          <a:p>
+            <a:pPr algn="l">
+              <a:lnSpc>
+                <a:spcPct val="102000"/>
+              </a:lnSpc>
+              <a:spcAft>
+                <a:spcPts val="600"/>
+              </a:spcAft>
+            </a:pPr>
+            <a:r>
+              <a:rPr sz="2000" b="0">
+                <a:solidFill>
+                  <a:srgbClr val="1C2B24"/>
+                </a:solidFill>
+                <a:latin typeface="Arial"/>
+                <a:cs typeface="Arial"/>
+                <a:ea typeface="Arial"/>
+              </a:rPr>
+              <a:t>•  Лицо памятника списано с её фронтовой фотографии.</a:t>
+            </a:r>
+          </a:p>
+          <a:p>
+            <a:pPr algn="l">
+              <a:lnSpc>
+                <a:spcPct val="102000"/>
+              </a:lnSpc>
+              <a:spcAft>
+                <a:spcPts val="600"/>
+              </a:spcAft>
+            </a:pPr>
+            <a:r>
+              <a:rPr sz="2000" b="0">
+                <a:solidFill>
+                  <a:srgbClr val="1C2B24"/>
+                </a:solidFill>
+                <a:latin typeface="Arial"/>
+                <a:cs typeface="Arial"/>
+                <a:ea typeface="Arial"/>
+              </a:rPr>
+              <a:t>•  Она прошла войну и встретила Победу в Берлине.</a:t>
+            </a:r>
+          </a:p>
+          <a:p>
+            <a:pPr algn="l">
+              <a:lnSpc>
+                <a:spcPct val="102000"/>
+              </a:lnSpc>
+              <a:spcAft>
+                <a:spcPts val="600"/>
+              </a:spcAft>
+            </a:pPr>
+            <a:r>
+              <a:rPr sz="2000" b="0">
+                <a:solidFill>
+                  <a:srgbClr val="1C2B24"/>
+                </a:solidFill>
+                <a:latin typeface="Arial"/>
+                <a:cs typeface="Arial"/>
+                <a:ea typeface="Arial"/>
+              </a:rPr>
+              <a:t>•  В Химках было десять госпиталей. Здесь проходил ближний рубеж обороны Москвы.</a:t>
+            </a:r>
+          </a:p>
+          <a:p>
+            <a:pPr algn="l">
+              <a:lnSpc>
+                <a:spcPct val="102000"/>
+              </a:lnSpc>
+              <a:spcAft>
+                <a:spcPts val="600"/>
+              </a:spcAft>
+            </a:pPr>
+            <a:r>
+              <a:rPr sz="2000" b="0">
+                <a:solidFill>
+                  <a:srgbClr val="1C2B24"/>
+                </a:solidFill>
+                <a:latin typeface="Arial"/>
+                <a:cs typeface="Arial"/>
+                <a:ea typeface="Arial"/>
+              </a:rPr>
+              <a:t>•  Две Марии: Рубцова озеленяла город, Семикова спасала раненых.</a:t>
             </a:r>
           </a:p>
         </p:txBody>
